--- a/public/videos/repositories/leaflet-web1/leaflet-web1-tech-preview.pptx
+++ b/public/videos/repositories/leaflet-web1/leaflet-web1-tech-preview.pptx
@@ -134,7 +134,7 @@
           <p:cNvPr id="2" name="タイトル 1">
             <a:extLst>
               <a:ext uri="{FF2B5EF4-FFF2-40B4-BE49-F238E27FC236}">
-                <a16:creationId xmlns:a16="http://schemas.microsoft.com/office/drawing/2014/main" id="{66302D2A-DD19-0D42-828F-323CDA5465B3}"/>
+                <a16:creationId xmlns:a16="http://schemas.microsoft.com/office/drawing/2014/main" id="{60554CB7-2C2D-E9E0-33DC-D038A397D43E}"/>
               </a:ext>
             </a:extLst>
           </p:cNvPr>
@@ -171,7 +171,7 @@
           <p:cNvPr id="3" name="字幕 2">
             <a:extLst>
               <a:ext uri="{FF2B5EF4-FFF2-40B4-BE49-F238E27FC236}">
-                <a16:creationId xmlns:a16="http://schemas.microsoft.com/office/drawing/2014/main" id="{3BF532E2-002A-3906-A952-10CC87B470C1}"/>
+                <a16:creationId xmlns:a16="http://schemas.microsoft.com/office/drawing/2014/main" id="{A8E8D3BA-A873-026B-381B-386DC9BE4BCD}"/>
               </a:ext>
             </a:extLst>
           </p:cNvPr>
@@ -241,7 +241,7 @@
           <p:cNvPr id="4" name="日付プレースホルダー 3">
             <a:extLst>
               <a:ext uri="{FF2B5EF4-FFF2-40B4-BE49-F238E27FC236}">
-                <a16:creationId xmlns:a16="http://schemas.microsoft.com/office/drawing/2014/main" id="{72CB2EA1-64AF-2BBA-79AC-047BDDB8F6C1}"/>
+                <a16:creationId xmlns:a16="http://schemas.microsoft.com/office/drawing/2014/main" id="{2D0A2ACF-902E-A16E-C7D6-B34B08141D1D}"/>
               </a:ext>
             </a:extLst>
           </p:cNvPr>
@@ -257,7 +257,7 @@
           <a:bodyPr/>
           <a:lstStyle/>
           <a:p>
-            <a:fld id="{1FEAEA19-90D4-4335-BF67-22EF79A7EB69}" type="datetimeFigureOut">
+            <a:fld id="{F04E7869-5D3E-4D61-9500-F031EB31109A}" type="datetimeFigureOut">
               <a:rPr kumimoji="1" lang="ja-JP" altLang="en-US" smtClean="0"/>
               <a:t>2026/7/30</a:t>
             </a:fld>
@@ -270,7 +270,7 @@
           <p:cNvPr id="5" name="フッター プレースホルダー 4">
             <a:extLst>
               <a:ext uri="{FF2B5EF4-FFF2-40B4-BE49-F238E27FC236}">
-                <a16:creationId xmlns:a16="http://schemas.microsoft.com/office/drawing/2014/main" id="{CFC87DA7-AEA0-9F64-6559-A9534F57AE50}"/>
+                <a16:creationId xmlns:a16="http://schemas.microsoft.com/office/drawing/2014/main" id="{68C99502-F1C7-7DA3-1036-EFD2C1B67A9E}"/>
               </a:ext>
             </a:extLst>
           </p:cNvPr>
@@ -295,7 +295,7 @@
           <p:cNvPr id="6" name="スライド番号プレースホルダー 5">
             <a:extLst>
               <a:ext uri="{FF2B5EF4-FFF2-40B4-BE49-F238E27FC236}">
-                <a16:creationId xmlns:a16="http://schemas.microsoft.com/office/drawing/2014/main" id="{63868063-5030-63A4-1BC3-E3C58BDE547D}"/>
+                <a16:creationId xmlns:a16="http://schemas.microsoft.com/office/drawing/2014/main" id="{C6965E37-7C3B-DB1D-F326-D2DA810CC689}"/>
               </a:ext>
             </a:extLst>
           </p:cNvPr>
@@ -311,7 +311,7 @@
           <a:bodyPr/>
           <a:lstStyle/>
           <a:p>
-            <a:fld id="{7C2052BB-089E-4BCF-A79B-67846E7B6111}" type="slidenum">
+            <a:fld id="{600A2B23-CD1C-44B4-B5A4-536257EE75C8}" type="slidenum">
               <a:rPr kumimoji="1" lang="ja-JP" altLang="en-US" smtClean="0"/>
               <a:t>‹#›</a:t>
             </a:fld>
@@ -322,7 +322,7 @@
     </p:spTree>
     <p:extLst>
       <p:ext uri="{BB962C8B-B14F-4D97-AF65-F5344CB8AC3E}">
-        <p14:creationId xmlns:p14="http://schemas.microsoft.com/office/powerpoint/2010/main" val="453413569"/>
+        <p14:creationId xmlns:p14="http://schemas.microsoft.com/office/powerpoint/2010/main" val="3244648281"/>
       </p:ext>
     </p:extLst>
   </p:cSld>
@@ -354,7 +354,7 @@
           <p:cNvPr id="2" name="タイトル 1">
             <a:extLst>
               <a:ext uri="{FF2B5EF4-FFF2-40B4-BE49-F238E27FC236}">
-                <a16:creationId xmlns:a16="http://schemas.microsoft.com/office/drawing/2014/main" id="{FACA7A9B-7C68-23DF-375D-77EECF899D3B}"/>
+                <a16:creationId xmlns:a16="http://schemas.microsoft.com/office/drawing/2014/main" id="{52A5E133-D8CD-DA23-5919-FC5114F87649}"/>
               </a:ext>
             </a:extLst>
           </p:cNvPr>
@@ -382,7 +382,7 @@
           <p:cNvPr id="3" name="縦書きテキスト プレースホルダー 2">
             <a:extLst>
               <a:ext uri="{FF2B5EF4-FFF2-40B4-BE49-F238E27FC236}">
-                <a16:creationId xmlns:a16="http://schemas.microsoft.com/office/drawing/2014/main" id="{88CF3BD3-3E0A-B4B1-B5DE-C72999DF8022}"/>
+                <a16:creationId xmlns:a16="http://schemas.microsoft.com/office/drawing/2014/main" id="{10DC3908-E28E-B7D1-9BBA-603E6B705316}"/>
               </a:ext>
             </a:extLst>
           </p:cNvPr>
@@ -471,7 +471,7 @@
           <p:cNvPr id="4" name="日付プレースホルダー 3">
             <a:extLst>
               <a:ext uri="{FF2B5EF4-FFF2-40B4-BE49-F238E27FC236}">
-                <a16:creationId xmlns:a16="http://schemas.microsoft.com/office/drawing/2014/main" id="{B64EC64F-FBC3-68C4-56C0-5FE3BF9BE27E}"/>
+                <a16:creationId xmlns:a16="http://schemas.microsoft.com/office/drawing/2014/main" id="{6F513D9E-646D-0CEC-EB7F-E6FEFC350D0E}"/>
               </a:ext>
             </a:extLst>
           </p:cNvPr>
@@ -487,7 +487,7 @@
           <a:bodyPr/>
           <a:lstStyle/>
           <a:p>
-            <a:fld id="{1FEAEA19-90D4-4335-BF67-22EF79A7EB69}" type="datetimeFigureOut">
+            <a:fld id="{F04E7869-5D3E-4D61-9500-F031EB31109A}" type="datetimeFigureOut">
               <a:rPr kumimoji="1" lang="ja-JP" altLang="en-US" smtClean="0"/>
               <a:t>2026/7/30</a:t>
             </a:fld>
@@ -500,7 +500,7 @@
           <p:cNvPr id="5" name="フッター プレースホルダー 4">
             <a:extLst>
               <a:ext uri="{FF2B5EF4-FFF2-40B4-BE49-F238E27FC236}">
-                <a16:creationId xmlns:a16="http://schemas.microsoft.com/office/drawing/2014/main" id="{DDABAAFA-7B78-A5E3-3A2A-A06BC088E44C}"/>
+                <a16:creationId xmlns:a16="http://schemas.microsoft.com/office/drawing/2014/main" id="{C1F76CAD-4CC3-9420-172C-3087EAFD4C2F}"/>
               </a:ext>
             </a:extLst>
           </p:cNvPr>
@@ -525,7 +525,7 @@
           <p:cNvPr id="6" name="スライド番号プレースホルダー 5">
             <a:extLst>
               <a:ext uri="{FF2B5EF4-FFF2-40B4-BE49-F238E27FC236}">
-                <a16:creationId xmlns:a16="http://schemas.microsoft.com/office/drawing/2014/main" id="{7E89D59F-8CBA-39FA-F6AA-07C3EE74C073}"/>
+                <a16:creationId xmlns:a16="http://schemas.microsoft.com/office/drawing/2014/main" id="{8DADE4F0-29C3-88A5-22CE-B08191FB8E8F}"/>
               </a:ext>
             </a:extLst>
           </p:cNvPr>
@@ -541,7 +541,7 @@
           <a:bodyPr/>
           <a:lstStyle/>
           <a:p>
-            <a:fld id="{7C2052BB-089E-4BCF-A79B-67846E7B6111}" type="slidenum">
+            <a:fld id="{600A2B23-CD1C-44B4-B5A4-536257EE75C8}" type="slidenum">
               <a:rPr kumimoji="1" lang="ja-JP" altLang="en-US" smtClean="0"/>
               <a:t>‹#›</a:t>
             </a:fld>
@@ -552,7 +552,7 @@
     </p:spTree>
     <p:extLst>
       <p:ext uri="{BB962C8B-B14F-4D97-AF65-F5344CB8AC3E}">
-        <p14:creationId xmlns:p14="http://schemas.microsoft.com/office/powerpoint/2010/main" val="3965103105"/>
+        <p14:creationId xmlns:p14="http://schemas.microsoft.com/office/powerpoint/2010/main" val="3092699477"/>
       </p:ext>
     </p:extLst>
   </p:cSld>
@@ -584,7 +584,7 @@
           <p:cNvPr id="2" name="縦書きタイトル 1">
             <a:extLst>
               <a:ext uri="{FF2B5EF4-FFF2-40B4-BE49-F238E27FC236}">
-                <a16:creationId xmlns:a16="http://schemas.microsoft.com/office/drawing/2014/main" id="{17D192A6-5C94-F16C-4F4B-B35407A8CCE6}"/>
+                <a16:creationId xmlns:a16="http://schemas.microsoft.com/office/drawing/2014/main" id="{5B793FAF-5E72-E38A-8A0E-38E0DBB43EB8}"/>
               </a:ext>
             </a:extLst>
           </p:cNvPr>
@@ -617,7 +617,7 @@
           <p:cNvPr id="3" name="縦書きテキスト プレースホルダー 2">
             <a:extLst>
               <a:ext uri="{FF2B5EF4-FFF2-40B4-BE49-F238E27FC236}">
-                <a16:creationId xmlns:a16="http://schemas.microsoft.com/office/drawing/2014/main" id="{2C104AC1-9896-A5B6-A538-76488D1D519B}"/>
+                <a16:creationId xmlns:a16="http://schemas.microsoft.com/office/drawing/2014/main" id="{829938D8-DCA7-955E-8C7D-3A6BB7EF924D}"/>
               </a:ext>
             </a:extLst>
           </p:cNvPr>
@@ -711,7 +711,7 @@
           <p:cNvPr id="4" name="日付プレースホルダー 3">
             <a:extLst>
               <a:ext uri="{FF2B5EF4-FFF2-40B4-BE49-F238E27FC236}">
-                <a16:creationId xmlns:a16="http://schemas.microsoft.com/office/drawing/2014/main" id="{2D3B93D0-204D-958D-BD64-BABA591F9FC6}"/>
+                <a16:creationId xmlns:a16="http://schemas.microsoft.com/office/drawing/2014/main" id="{05007D36-1610-75ED-8211-7B1DDF9E6F4D}"/>
               </a:ext>
             </a:extLst>
           </p:cNvPr>
@@ -727,7 +727,7 @@
           <a:bodyPr/>
           <a:lstStyle/>
           <a:p>
-            <a:fld id="{1FEAEA19-90D4-4335-BF67-22EF79A7EB69}" type="datetimeFigureOut">
+            <a:fld id="{F04E7869-5D3E-4D61-9500-F031EB31109A}" type="datetimeFigureOut">
               <a:rPr kumimoji="1" lang="ja-JP" altLang="en-US" smtClean="0"/>
               <a:t>2026/7/30</a:t>
             </a:fld>
@@ -740,7 +740,7 @@
           <p:cNvPr id="5" name="フッター プレースホルダー 4">
             <a:extLst>
               <a:ext uri="{FF2B5EF4-FFF2-40B4-BE49-F238E27FC236}">
-                <a16:creationId xmlns:a16="http://schemas.microsoft.com/office/drawing/2014/main" id="{359F9CE2-39DD-A69A-41B2-6C1BC2410271}"/>
+                <a16:creationId xmlns:a16="http://schemas.microsoft.com/office/drawing/2014/main" id="{18D9B508-EC92-FE1F-80B0-6E10577D84D3}"/>
               </a:ext>
             </a:extLst>
           </p:cNvPr>
@@ -765,7 +765,7 @@
           <p:cNvPr id="6" name="スライド番号プレースホルダー 5">
             <a:extLst>
               <a:ext uri="{FF2B5EF4-FFF2-40B4-BE49-F238E27FC236}">
-                <a16:creationId xmlns:a16="http://schemas.microsoft.com/office/drawing/2014/main" id="{F625EC00-A2EF-3FE4-D38F-E2B6FE007E9C}"/>
+                <a16:creationId xmlns:a16="http://schemas.microsoft.com/office/drawing/2014/main" id="{65DB34C4-09DB-12F9-67EC-64F39C215ECF}"/>
               </a:ext>
             </a:extLst>
           </p:cNvPr>
@@ -781,7 +781,7 @@
           <a:bodyPr/>
           <a:lstStyle/>
           <a:p>
-            <a:fld id="{7C2052BB-089E-4BCF-A79B-67846E7B6111}" type="slidenum">
+            <a:fld id="{600A2B23-CD1C-44B4-B5A4-536257EE75C8}" type="slidenum">
               <a:rPr kumimoji="1" lang="ja-JP" altLang="en-US" smtClean="0"/>
               <a:t>‹#›</a:t>
             </a:fld>
@@ -792,7 +792,7 @@
     </p:spTree>
     <p:extLst>
       <p:ext uri="{BB962C8B-B14F-4D97-AF65-F5344CB8AC3E}">
-        <p14:creationId xmlns:p14="http://schemas.microsoft.com/office/powerpoint/2010/main" val="3170231580"/>
+        <p14:creationId xmlns:p14="http://schemas.microsoft.com/office/powerpoint/2010/main" val="3193406796"/>
       </p:ext>
     </p:extLst>
   </p:cSld>
@@ -824,7 +824,7 @@
           <p:cNvPr id="2" name="タイトル 1">
             <a:extLst>
               <a:ext uri="{FF2B5EF4-FFF2-40B4-BE49-F238E27FC236}">
-                <a16:creationId xmlns:a16="http://schemas.microsoft.com/office/drawing/2014/main" id="{64C6B3CD-E882-7D46-5202-424112766395}"/>
+                <a16:creationId xmlns:a16="http://schemas.microsoft.com/office/drawing/2014/main" id="{3021821E-4082-0077-D9AC-C967C789D201}"/>
               </a:ext>
             </a:extLst>
           </p:cNvPr>
@@ -852,7 +852,7 @@
           <p:cNvPr id="3" name="コンテンツ プレースホルダー 2">
             <a:extLst>
               <a:ext uri="{FF2B5EF4-FFF2-40B4-BE49-F238E27FC236}">
-                <a16:creationId xmlns:a16="http://schemas.microsoft.com/office/drawing/2014/main" id="{017BCA4E-F2B0-B612-0815-A3723D215D28}"/>
+                <a16:creationId xmlns:a16="http://schemas.microsoft.com/office/drawing/2014/main" id="{E8828B73-D089-06EB-687F-29DBDDBE4973}"/>
               </a:ext>
             </a:extLst>
           </p:cNvPr>
@@ -941,7 +941,7 @@
           <p:cNvPr id="4" name="日付プレースホルダー 3">
             <a:extLst>
               <a:ext uri="{FF2B5EF4-FFF2-40B4-BE49-F238E27FC236}">
-                <a16:creationId xmlns:a16="http://schemas.microsoft.com/office/drawing/2014/main" id="{ADD22071-D633-F1C1-F5E6-62390A933CE4}"/>
+                <a16:creationId xmlns:a16="http://schemas.microsoft.com/office/drawing/2014/main" id="{CF94336D-0E17-06DA-C5B1-D52136C960A2}"/>
               </a:ext>
             </a:extLst>
           </p:cNvPr>
@@ -957,7 +957,7 @@
           <a:bodyPr/>
           <a:lstStyle/>
           <a:p>
-            <a:fld id="{1FEAEA19-90D4-4335-BF67-22EF79A7EB69}" type="datetimeFigureOut">
+            <a:fld id="{F04E7869-5D3E-4D61-9500-F031EB31109A}" type="datetimeFigureOut">
               <a:rPr kumimoji="1" lang="ja-JP" altLang="en-US" smtClean="0"/>
               <a:t>2026/7/30</a:t>
             </a:fld>
@@ -970,7 +970,7 @@
           <p:cNvPr id="5" name="フッター プレースホルダー 4">
             <a:extLst>
               <a:ext uri="{FF2B5EF4-FFF2-40B4-BE49-F238E27FC236}">
-                <a16:creationId xmlns:a16="http://schemas.microsoft.com/office/drawing/2014/main" id="{32AA2307-859F-8A99-4C7F-D28E497D4F3D}"/>
+                <a16:creationId xmlns:a16="http://schemas.microsoft.com/office/drawing/2014/main" id="{3D34657D-C1A9-9F35-0228-4E72C6D514F2}"/>
               </a:ext>
             </a:extLst>
           </p:cNvPr>
@@ -995,7 +995,7 @@
           <p:cNvPr id="6" name="スライド番号プレースホルダー 5">
             <a:extLst>
               <a:ext uri="{FF2B5EF4-FFF2-40B4-BE49-F238E27FC236}">
-                <a16:creationId xmlns:a16="http://schemas.microsoft.com/office/drawing/2014/main" id="{B0B12611-971C-6BCE-5031-3B67023BA9FA}"/>
+                <a16:creationId xmlns:a16="http://schemas.microsoft.com/office/drawing/2014/main" id="{3AEDFE76-8C6E-05D8-F33E-355BCE714FAA}"/>
               </a:ext>
             </a:extLst>
           </p:cNvPr>
@@ -1011,7 +1011,7 @@
           <a:bodyPr/>
           <a:lstStyle/>
           <a:p>
-            <a:fld id="{7C2052BB-089E-4BCF-A79B-67846E7B6111}" type="slidenum">
+            <a:fld id="{600A2B23-CD1C-44B4-B5A4-536257EE75C8}" type="slidenum">
               <a:rPr kumimoji="1" lang="ja-JP" altLang="en-US" smtClean="0"/>
               <a:t>‹#›</a:t>
             </a:fld>
@@ -1022,7 +1022,7 @@
     </p:spTree>
     <p:extLst>
       <p:ext uri="{BB962C8B-B14F-4D97-AF65-F5344CB8AC3E}">
-        <p14:creationId xmlns:p14="http://schemas.microsoft.com/office/powerpoint/2010/main" val="178396901"/>
+        <p14:creationId xmlns:p14="http://schemas.microsoft.com/office/powerpoint/2010/main" val="2347152338"/>
       </p:ext>
     </p:extLst>
   </p:cSld>
@@ -1054,7 +1054,7 @@
           <p:cNvPr id="2" name="タイトル 1">
             <a:extLst>
               <a:ext uri="{FF2B5EF4-FFF2-40B4-BE49-F238E27FC236}">
-                <a16:creationId xmlns:a16="http://schemas.microsoft.com/office/drawing/2014/main" id="{26AE554F-F8AD-DE4A-F1C1-416D071C9115}"/>
+                <a16:creationId xmlns:a16="http://schemas.microsoft.com/office/drawing/2014/main" id="{5EB062C6-F2EC-2A0C-561E-9B0C15A3D4BC}"/>
               </a:ext>
             </a:extLst>
           </p:cNvPr>
@@ -1091,7 +1091,7 @@
           <p:cNvPr id="3" name="テキスト プレースホルダー 2">
             <a:extLst>
               <a:ext uri="{FF2B5EF4-FFF2-40B4-BE49-F238E27FC236}">
-                <a16:creationId xmlns:a16="http://schemas.microsoft.com/office/drawing/2014/main" id="{5B77FEB7-B511-8C19-4030-3E43A5253177}"/>
+                <a16:creationId xmlns:a16="http://schemas.microsoft.com/office/drawing/2014/main" id="{30398E19-C837-A1CA-D7C9-10DD28A7DC0B}"/>
               </a:ext>
             </a:extLst>
           </p:cNvPr>
@@ -1216,7 +1216,7 @@
           <p:cNvPr id="4" name="日付プレースホルダー 3">
             <a:extLst>
               <a:ext uri="{FF2B5EF4-FFF2-40B4-BE49-F238E27FC236}">
-                <a16:creationId xmlns:a16="http://schemas.microsoft.com/office/drawing/2014/main" id="{A649B145-0A54-8E23-F804-85C93EE69FD5}"/>
+                <a16:creationId xmlns:a16="http://schemas.microsoft.com/office/drawing/2014/main" id="{C45EF853-E183-CEE4-6467-B5F00AD4FD49}"/>
               </a:ext>
             </a:extLst>
           </p:cNvPr>
@@ -1232,7 +1232,7 @@
           <a:bodyPr/>
           <a:lstStyle/>
           <a:p>
-            <a:fld id="{1FEAEA19-90D4-4335-BF67-22EF79A7EB69}" type="datetimeFigureOut">
+            <a:fld id="{F04E7869-5D3E-4D61-9500-F031EB31109A}" type="datetimeFigureOut">
               <a:rPr kumimoji="1" lang="ja-JP" altLang="en-US" smtClean="0"/>
               <a:t>2026/7/30</a:t>
             </a:fld>
@@ -1245,7 +1245,7 @@
           <p:cNvPr id="5" name="フッター プレースホルダー 4">
             <a:extLst>
               <a:ext uri="{FF2B5EF4-FFF2-40B4-BE49-F238E27FC236}">
-                <a16:creationId xmlns:a16="http://schemas.microsoft.com/office/drawing/2014/main" id="{833DDA11-4C57-61E4-2A55-A84B7986F644}"/>
+                <a16:creationId xmlns:a16="http://schemas.microsoft.com/office/drawing/2014/main" id="{6D1EF840-F165-22F9-4B29-7C2D41DD9720}"/>
               </a:ext>
             </a:extLst>
           </p:cNvPr>
@@ -1270,7 +1270,7 @@
           <p:cNvPr id="6" name="スライド番号プレースホルダー 5">
             <a:extLst>
               <a:ext uri="{FF2B5EF4-FFF2-40B4-BE49-F238E27FC236}">
-                <a16:creationId xmlns:a16="http://schemas.microsoft.com/office/drawing/2014/main" id="{0AC700DB-6ECD-A290-4FD0-BE33EDBF4D19}"/>
+                <a16:creationId xmlns:a16="http://schemas.microsoft.com/office/drawing/2014/main" id="{598493AD-E13C-2640-2C77-1AEB1AA99B88}"/>
               </a:ext>
             </a:extLst>
           </p:cNvPr>
@@ -1286,7 +1286,7 @@
           <a:bodyPr/>
           <a:lstStyle/>
           <a:p>
-            <a:fld id="{7C2052BB-089E-4BCF-A79B-67846E7B6111}" type="slidenum">
+            <a:fld id="{600A2B23-CD1C-44B4-B5A4-536257EE75C8}" type="slidenum">
               <a:rPr kumimoji="1" lang="ja-JP" altLang="en-US" smtClean="0"/>
               <a:t>‹#›</a:t>
             </a:fld>
@@ -1297,7 +1297,7 @@
     </p:spTree>
     <p:extLst>
       <p:ext uri="{BB962C8B-B14F-4D97-AF65-F5344CB8AC3E}">
-        <p14:creationId xmlns:p14="http://schemas.microsoft.com/office/powerpoint/2010/main" val="3743102424"/>
+        <p14:creationId xmlns:p14="http://schemas.microsoft.com/office/powerpoint/2010/main" val="1267047436"/>
       </p:ext>
     </p:extLst>
   </p:cSld>
@@ -1329,7 +1329,7 @@
           <p:cNvPr id="2" name="タイトル 1">
             <a:extLst>
               <a:ext uri="{FF2B5EF4-FFF2-40B4-BE49-F238E27FC236}">
-                <a16:creationId xmlns:a16="http://schemas.microsoft.com/office/drawing/2014/main" id="{0C467AFE-C167-0A32-009A-D4C55F00B70E}"/>
+                <a16:creationId xmlns:a16="http://schemas.microsoft.com/office/drawing/2014/main" id="{1A2D35CF-C1E0-678F-7004-3D922B06EF46}"/>
               </a:ext>
             </a:extLst>
           </p:cNvPr>
@@ -1357,7 +1357,7 @@
           <p:cNvPr id="3" name="コンテンツ プレースホルダー 2">
             <a:extLst>
               <a:ext uri="{FF2B5EF4-FFF2-40B4-BE49-F238E27FC236}">
-                <a16:creationId xmlns:a16="http://schemas.microsoft.com/office/drawing/2014/main" id="{DBE1DACB-506B-EAEF-AE5C-55317295CE41}"/>
+                <a16:creationId xmlns:a16="http://schemas.microsoft.com/office/drawing/2014/main" id="{D38D9CF7-1DFC-57A7-F355-D24403E141C4}"/>
               </a:ext>
             </a:extLst>
           </p:cNvPr>
@@ -1451,7 +1451,7 @@
           <p:cNvPr id="4" name="コンテンツ プレースホルダー 3">
             <a:extLst>
               <a:ext uri="{FF2B5EF4-FFF2-40B4-BE49-F238E27FC236}">
-                <a16:creationId xmlns:a16="http://schemas.microsoft.com/office/drawing/2014/main" id="{B54785A8-6AE3-0696-557B-EB91CC7DF6A3}"/>
+                <a16:creationId xmlns:a16="http://schemas.microsoft.com/office/drawing/2014/main" id="{8E0B2797-75BA-385F-095B-F5AADC57A719}"/>
               </a:ext>
             </a:extLst>
           </p:cNvPr>
@@ -1545,7 +1545,7 @@
           <p:cNvPr id="5" name="日付プレースホルダー 4">
             <a:extLst>
               <a:ext uri="{FF2B5EF4-FFF2-40B4-BE49-F238E27FC236}">
-                <a16:creationId xmlns:a16="http://schemas.microsoft.com/office/drawing/2014/main" id="{1DFF7290-1834-535F-BBB3-3C3BFE18E583}"/>
+                <a16:creationId xmlns:a16="http://schemas.microsoft.com/office/drawing/2014/main" id="{9AF3B18C-0DB5-2180-90E5-5D89B471090B}"/>
               </a:ext>
             </a:extLst>
           </p:cNvPr>
@@ -1561,7 +1561,7 @@
           <a:bodyPr/>
           <a:lstStyle/>
           <a:p>
-            <a:fld id="{1FEAEA19-90D4-4335-BF67-22EF79A7EB69}" type="datetimeFigureOut">
+            <a:fld id="{F04E7869-5D3E-4D61-9500-F031EB31109A}" type="datetimeFigureOut">
               <a:rPr kumimoji="1" lang="ja-JP" altLang="en-US" smtClean="0"/>
               <a:t>2026/7/30</a:t>
             </a:fld>
@@ -1574,7 +1574,7 @@
           <p:cNvPr id="6" name="フッター プレースホルダー 5">
             <a:extLst>
               <a:ext uri="{FF2B5EF4-FFF2-40B4-BE49-F238E27FC236}">
-                <a16:creationId xmlns:a16="http://schemas.microsoft.com/office/drawing/2014/main" id="{1DAF20E4-4F4F-52D5-313D-CDA92AB9F0DA}"/>
+                <a16:creationId xmlns:a16="http://schemas.microsoft.com/office/drawing/2014/main" id="{032DFD76-5DCE-F2EB-62D8-329B13E24979}"/>
               </a:ext>
             </a:extLst>
           </p:cNvPr>
@@ -1599,7 +1599,7 @@
           <p:cNvPr id="7" name="スライド番号プレースホルダー 6">
             <a:extLst>
               <a:ext uri="{FF2B5EF4-FFF2-40B4-BE49-F238E27FC236}">
-                <a16:creationId xmlns:a16="http://schemas.microsoft.com/office/drawing/2014/main" id="{F9A528EE-DF29-F12A-EC00-077CC8537F76}"/>
+                <a16:creationId xmlns:a16="http://schemas.microsoft.com/office/drawing/2014/main" id="{EED06728-2EA2-54E3-78E5-C2CE53E3AE35}"/>
               </a:ext>
             </a:extLst>
           </p:cNvPr>
@@ -1615,7 +1615,7 @@
           <a:bodyPr/>
           <a:lstStyle/>
           <a:p>
-            <a:fld id="{7C2052BB-089E-4BCF-A79B-67846E7B6111}" type="slidenum">
+            <a:fld id="{600A2B23-CD1C-44B4-B5A4-536257EE75C8}" type="slidenum">
               <a:rPr kumimoji="1" lang="ja-JP" altLang="en-US" smtClean="0"/>
               <a:t>‹#›</a:t>
             </a:fld>
@@ -1626,7 +1626,7 @@
     </p:spTree>
     <p:extLst>
       <p:ext uri="{BB962C8B-B14F-4D97-AF65-F5344CB8AC3E}">
-        <p14:creationId xmlns:p14="http://schemas.microsoft.com/office/powerpoint/2010/main" val="291550359"/>
+        <p14:creationId xmlns:p14="http://schemas.microsoft.com/office/powerpoint/2010/main" val="1239861980"/>
       </p:ext>
     </p:extLst>
   </p:cSld>
@@ -1658,7 +1658,7 @@
           <p:cNvPr id="2" name="タイトル 1">
             <a:extLst>
               <a:ext uri="{FF2B5EF4-FFF2-40B4-BE49-F238E27FC236}">
-                <a16:creationId xmlns:a16="http://schemas.microsoft.com/office/drawing/2014/main" id="{A5C61E5A-BDD0-6399-BC8F-2C522DECE3E8}"/>
+                <a16:creationId xmlns:a16="http://schemas.microsoft.com/office/drawing/2014/main" id="{D2171884-C1EA-F0B4-54F7-D7E22551C1C7}"/>
               </a:ext>
             </a:extLst>
           </p:cNvPr>
@@ -1691,7 +1691,7 @@
           <p:cNvPr id="3" name="テキスト プレースホルダー 2">
             <a:extLst>
               <a:ext uri="{FF2B5EF4-FFF2-40B4-BE49-F238E27FC236}">
-                <a16:creationId xmlns:a16="http://schemas.microsoft.com/office/drawing/2014/main" id="{A534885E-9742-A7E0-4C2B-8430F870B529}"/>
+                <a16:creationId xmlns:a16="http://schemas.microsoft.com/office/drawing/2014/main" id="{E0CE5B08-9406-E004-9D7F-170BE83D26D0}"/>
               </a:ext>
             </a:extLst>
           </p:cNvPr>
@@ -1762,7 +1762,7 @@
           <p:cNvPr id="4" name="コンテンツ プレースホルダー 3">
             <a:extLst>
               <a:ext uri="{FF2B5EF4-FFF2-40B4-BE49-F238E27FC236}">
-                <a16:creationId xmlns:a16="http://schemas.microsoft.com/office/drawing/2014/main" id="{DBE49A4D-1FA9-9BFB-AB48-489A75D9BB30}"/>
+                <a16:creationId xmlns:a16="http://schemas.microsoft.com/office/drawing/2014/main" id="{0BB736D0-139D-D13A-5950-8639A15B8CBB}"/>
               </a:ext>
             </a:extLst>
           </p:cNvPr>
@@ -1856,7 +1856,7 @@
           <p:cNvPr id="5" name="テキスト プレースホルダー 4">
             <a:extLst>
               <a:ext uri="{FF2B5EF4-FFF2-40B4-BE49-F238E27FC236}">
-                <a16:creationId xmlns:a16="http://schemas.microsoft.com/office/drawing/2014/main" id="{116FB64C-B113-59E0-CE65-5AEA41908E40}"/>
+                <a16:creationId xmlns:a16="http://schemas.microsoft.com/office/drawing/2014/main" id="{D8FE85AF-4144-9489-28FC-11F9C2F871DE}"/>
               </a:ext>
             </a:extLst>
           </p:cNvPr>
@@ -1927,7 +1927,7 @@
           <p:cNvPr id="6" name="コンテンツ プレースホルダー 5">
             <a:extLst>
               <a:ext uri="{FF2B5EF4-FFF2-40B4-BE49-F238E27FC236}">
-                <a16:creationId xmlns:a16="http://schemas.microsoft.com/office/drawing/2014/main" id="{77A54781-0217-8ECB-AF80-B3F7675A33FE}"/>
+                <a16:creationId xmlns:a16="http://schemas.microsoft.com/office/drawing/2014/main" id="{CDC376A0-77EA-6F6D-3B93-8B91E8B81EF3}"/>
               </a:ext>
             </a:extLst>
           </p:cNvPr>
@@ -2021,7 +2021,7 @@
           <p:cNvPr id="7" name="日付プレースホルダー 6">
             <a:extLst>
               <a:ext uri="{FF2B5EF4-FFF2-40B4-BE49-F238E27FC236}">
-                <a16:creationId xmlns:a16="http://schemas.microsoft.com/office/drawing/2014/main" id="{E0CC0062-229C-E226-FC6A-B0E3938A7A96}"/>
+                <a16:creationId xmlns:a16="http://schemas.microsoft.com/office/drawing/2014/main" id="{B75E0FAA-E4A5-5FEB-0C70-03783AE34F8C}"/>
               </a:ext>
             </a:extLst>
           </p:cNvPr>
@@ -2037,7 +2037,7 @@
           <a:bodyPr/>
           <a:lstStyle/>
           <a:p>
-            <a:fld id="{1FEAEA19-90D4-4335-BF67-22EF79A7EB69}" type="datetimeFigureOut">
+            <a:fld id="{F04E7869-5D3E-4D61-9500-F031EB31109A}" type="datetimeFigureOut">
               <a:rPr kumimoji="1" lang="ja-JP" altLang="en-US" smtClean="0"/>
               <a:t>2026/7/30</a:t>
             </a:fld>
@@ -2050,7 +2050,7 @@
           <p:cNvPr id="8" name="フッター プレースホルダー 7">
             <a:extLst>
               <a:ext uri="{FF2B5EF4-FFF2-40B4-BE49-F238E27FC236}">
-                <a16:creationId xmlns:a16="http://schemas.microsoft.com/office/drawing/2014/main" id="{EBD576CD-B86A-86FC-1326-FCC6CC325609}"/>
+                <a16:creationId xmlns:a16="http://schemas.microsoft.com/office/drawing/2014/main" id="{BC1641E1-1685-D4AA-59A8-E1ED912090F1}"/>
               </a:ext>
             </a:extLst>
           </p:cNvPr>
@@ -2075,7 +2075,7 @@
           <p:cNvPr id="9" name="スライド番号プレースホルダー 8">
             <a:extLst>
               <a:ext uri="{FF2B5EF4-FFF2-40B4-BE49-F238E27FC236}">
-                <a16:creationId xmlns:a16="http://schemas.microsoft.com/office/drawing/2014/main" id="{EBA5EE48-41EA-5F3A-9426-B6D579D5FB51}"/>
+                <a16:creationId xmlns:a16="http://schemas.microsoft.com/office/drawing/2014/main" id="{AE4D5C5A-A854-045A-6F79-42022F95AF7C}"/>
               </a:ext>
             </a:extLst>
           </p:cNvPr>
@@ -2091,7 +2091,7 @@
           <a:bodyPr/>
           <a:lstStyle/>
           <a:p>
-            <a:fld id="{7C2052BB-089E-4BCF-A79B-67846E7B6111}" type="slidenum">
+            <a:fld id="{600A2B23-CD1C-44B4-B5A4-536257EE75C8}" type="slidenum">
               <a:rPr kumimoji="1" lang="ja-JP" altLang="en-US" smtClean="0"/>
               <a:t>‹#›</a:t>
             </a:fld>
@@ -2102,7 +2102,7 @@
     </p:spTree>
     <p:extLst>
       <p:ext uri="{BB962C8B-B14F-4D97-AF65-F5344CB8AC3E}">
-        <p14:creationId xmlns:p14="http://schemas.microsoft.com/office/powerpoint/2010/main" val="840863079"/>
+        <p14:creationId xmlns:p14="http://schemas.microsoft.com/office/powerpoint/2010/main" val="825245194"/>
       </p:ext>
     </p:extLst>
   </p:cSld>
@@ -2134,7 +2134,7 @@
           <p:cNvPr id="2" name="タイトル 1">
             <a:extLst>
               <a:ext uri="{FF2B5EF4-FFF2-40B4-BE49-F238E27FC236}">
-                <a16:creationId xmlns:a16="http://schemas.microsoft.com/office/drawing/2014/main" id="{743D94E7-F0BA-19DE-E1C1-ADD28DCB65D7}"/>
+                <a16:creationId xmlns:a16="http://schemas.microsoft.com/office/drawing/2014/main" id="{28161FBC-0CC0-4A1F-2B0B-A8CC8AD7E2D9}"/>
               </a:ext>
             </a:extLst>
           </p:cNvPr>
@@ -2162,7 +2162,7 @@
           <p:cNvPr id="3" name="日付プレースホルダー 2">
             <a:extLst>
               <a:ext uri="{FF2B5EF4-FFF2-40B4-BE49-F238E27FC236}">
-                <a16:creationId xmlns:a16="http://schemas.microsoft.com/office/drawing/2014/main" id="{FC94D6DA-2027-46EF-6EFD-078CD8154DBF}"/>
+                <a16:creationId xmlns:a16="http://schemas.microsoft.com/office/drawing/2014/main" id="{D5045000-D5C2-DAC4-725D-93A896586503}"/>
               </a:ext>
             </a:extLst>
           </p:cNvPr>
@@ -2178,7 +2178,7 @@
           <a:bodyPr/>
           <a:lstStyle/>
           <a:p>
-            <a:fld id="{1FEAEA19-90D4-4335-BF67-22EF79A7EB69}" type="datetimeFigureOut">
+            <a:fld id="{F04E7869-5D3E-4D61-9500-F031EB31109A}" type="datetimeFigureOut">
               <a:rPr kumimoji="1" lang="ja-JP" altLang="en-US" smtClean="0"/>
               <a:t>2026/7/30</a:t>
             </a:fld>
@@ -2191,7 +2191,7 @@
           <p:cNvPr id="4" name="フッター プレースホルダー 3">
             <a:extLst>
               <a:ext uri="{FF2B5EF4-FFF2-40B4-BE49-F238E27FC236}">
-                <a16:creationId xmlns:a16="http://schemas.microsoft.com/office/drawing/2014/main" id="{E42D40E1-C88D-4A1F-10B8-A8F440F1A396}"/>
+                <a16:creationId xmlns:a16="http://schemas.microsoft.com/office/drawing/2014/main" id="{C906DBD8-3B5C-C7CE-334E-ABF472993785}"/>
               </a:ext>
             </a:extLst>
           </p:cNvPr>
@@ -2216,7 +2216,7 @@
           <p:cNvPr id="5" name="スライド番号プレースホルダー 4">
             <a:extLst>
               <a:ext uri="{FF2B5EF4-FFF2-40B4-BE49-F238E27FC236}">
-                <a16:creationId xmlns:a16="http://schemas.microsoft.com/office/drawing/2014/main" id="{882288C9-BF12-B561-FBAC-9511CD876676}"/>
+                <a16:creationId xmlns:a16="http://schemas.microsoft.com/office/drawing/2014/main" id="{6057A7B3-DA1C-7913-4449-01442BCA4A6D}"/>
               </a:ext>
             </a:extLst>
           </p:cNvPr>
@@ -2232,7 +2232,7 @@
           <a:bodyPr/>
           <a:lstStyle/>
           <a:p>
-            <a:fld id="{7C2052BB-089E-4BCF-A79B-67846E7B6111}" type="slidenum">
+            <a:fld id="{600A2B23-CD1C-44B4-B5A4-536257EE75C8}" type="slidenum">
               <a:rPr kumimoji="1" lang="ja-JP" altLang="en-US" smtClean="0"/>
               <a:t>‹#›</a:t>
             </a:fld>
@@ -2243,7 +2243,7 @@
     </p:spTree>
     <p:extLst>
       <p:ext uri="{BB962C8B-B14F-4D97-AF65-F5344CB8AC3E}">
-        <p14:creationId xmlns:p14="http://schemas.microsoft.com/office/powerpoint/2010/main" val="1654630563"/>
+        <p14:creationId xmlns:p14="http://schemas.microsoft.com/office/powerpoint/2010/main" val="216147110"/>
       </p:ext>
     </p:extLst>
   </p:cSld>
@@ -2275,7 +2275,7 @@
           <p:cNvPr id="2" name="日付プレースホルダー 1">
             <a:extLst>
               <a:ext uri="{FF2B5EF4-FFF2-40B4-BE49-F238E27FC236}">
-                <a16:creationId xmlns:a16="http://schemas.microsoft.com/office/drawing/2014/main" id="{B1B59E49-8CEE-9569-A2C5-19CB2644CC29}"/>
+                <a16:creationId xmlns:a16="http://schemas.microsoft.com/office/drawing/2014/main" id="{7BCA391A-A8F6-DB66-7FB1-2BC2E12B3864}"/>
               </a:ext>
             </a:extLst>
           </p:cNvPr>
@@ -2291,7 +2291,7 @@
           <a:bodyPr/>
           <a:lstStyle/>
           <a:p>
-            <a:fld id="{1FEAEA19-90D4-4335-BF67-22EF79A7EB69}" type="datetimeFigureOut">
+            <a:fld id="{F04E7869-5D3E-4D61-9500-F031EB31109A}" type="datetimeFigureOut">
               <a:rPr kumimoji="1" lang="ja-JP" altLang="en-US" smtClean="0"/>
               <a:t>2026/7/30</a:t>
             </a:fld>
@@ -2304,7 +2304,7 @@
           <p:cNvPr id="3" name="フッター プレースホルダー 2">
             <a:extLst>
               <a:ext uri="{FF2B5EF4-FFF2-40B4-BE49-F238E27FC236}">
-                <a16:creationId xmlns:a16="http://schemas.microsoft.com/office/drawing/2014/main" id="{B30897D2-B75D-16DB-8F16-CE02824F349D}"/>
+                <a16:creationId xmlns:a16="http://schemas.microsoft.com/office/drawing/2014/main" id="{A5CFD911-A446-A993-5AB6-E9B072420A51}"/>
               </a:ext>
             </a:extLst>
           </p:cNvPr>
@@ -2329,7 +2329,7 @@
           <p:cNvPr id="4" name="スライド番号プレースホルダー 3">
             <a:extLst>
               <a:ext uri="{FF2B5EF4-FFF2-40B4-BE49-F238E27FC236}">
-                <a16:creationId xmlns:a16="http://schemas.microsoft.com/office/drawing/2014/main" id="{450557D9-2C33-3FCE-BB4A-8B1A1AC29B64}"/>
+                <a16:creationId xmlns:a16="http://schemas.microsoft.com/office/drawing/2014/main" id="{E7824C4C-79AC-DDB5-6C50-80AF5C041AE4}"/>
               </a:ext>
             </a:extLst>
           </p:cNvPr>
@@ -2345,7 +2345,7 @@
           <a:bodyPr/>
           <a:lstStyle/>
           <a:p>
-            <a:fld id="{7C2052BB-089E-4BCF-A79B-67846E7B6111}" type="slidenum">
+            <a:fld id="{600A2B23-CD1C-44B4-B5A4-536257EE75C8}" type="slidenum">
               <a:rPr kumimoji="1" lang="ja-JP" altLang="en-US" smtClean="0"/>
               <a:t>‹#›</a:t>
             </a:fld>
@@ -2356,7 +2356,7 @@
     </p:spTree>
     <p:extLst>
       <p:ext uri="{BB962C8B-B14F-4D97-AF65-F5344CB8AC3E}">
-        <p14:creationId xmlns:p14="http://schemas.microsoft.com/office/powerpoint/2010/main" val="2629812106"/>
+        <p14:creationId xmlns:p14="http://schemas.microsoft.com/office/powerpoint/2010/main" val="905956529"/>
       </p:ext>
     </p:extLst>
   </p:cSld>
@@ -2388,7 +2388,7 @@
           <p:cNvPr id="2" name="タイトル 1">
             <a:extLst>
               <a:ext uri="{FF2B5EF4-FFF2-40B4-BE49-F238E27FC236}">
-                <a16:creationId xmlns:a16="http://schemas.microsoft.com/office/drawing/2014/main" id="{DADFAFBA-E12D-FF27-F7C1-EE6E26E3536E}"/>
+                <a16:creationId xmlns:a16="http://schemas.microsoft.com/office/drawing/2014/main" id="{4411B36F-15C3-3DAD-AEA0-F672A12BD31A}"/>
               </a:ext>
             </a:extLst>
           </p:cNvPr>
@@ -2425,7 +2425,7 @@
           <p:cNvPr id="3" name="コンテンツ プレースホルダー 2">
             <a:extLst>
               <a:ext uri="{FF2B5EF4-FFF2-40B4-BE49-F238E27FC236}">
-                <a16:creationId xmlns:a16="http://schemas.microsoft.com/office/drawing/2014/main" id="{C27DEF82-555F-E001-1467-794357FEEBC6}"/>
+                <a16:creationId xmlns:a16="http://schemas.microsoft.com/office/drawing/2014/main" id="{5602ADD1-B468-45CC-C2AF-0C4880F986BF}"/>
               </a:ext>
             </a:extLst>
           </p:cNvPr>
@@ -2547,7 +2547,7 @@
           <p:cNvPr id="4" name="テキスト プレースホルダー 3">
             <a:extLst>
               <a:ext uri="{FF2B5EF4-FFF2-40B4-BE49-F238E27FC236}">
-                <a16:creationId xmlns:a16="http://schemas.microsoft.com/office/drawing/2014/main" id="{7CB3D70F-A2F9-E749-379B-B89C5E5262D0}"/>
+                <a16:creationId xmlns:a16="http://schemas.microsoft.com/office/drawing/2014/main" id="{D1853B32-5DEC-C61C-D29F-491EEEFAAC6E}"/>
               </a:ext>
             </a:extLst>
           </p:cNvPr>
@@ -2618,7 +2618,7 @@
           <p:cNvPr id="5" name="日付プレースホルダー 4">
             <a:extLst>
               <a:ext uri="{FF2B5EF4-FFF2-40B4-BE49-F238E27FC236}">
-                <a16:creationId xmlns:a16="http://schemas.microsoft.com/office/drawing/2014/main" id="{214D0281-E7AE-FA5F-FEFE-A297D7DCE841}"/>
+                <a16:creationId xmlns:a16="http://schemas.microsoft.com/office/drawing/2014/main" id="{DB3A2C0E-BB8D-A52D-76D3-1B40386FF13F}"/>
               </a:ext>
             </a:extLst>
           </p:cNvPr>
@@ -2634,7 +2634,7 @@
           <a:bodyPr/>
           <a:lstStyle/>
           <a:p>
-            <a:fld id="{1FEAEA19-90D4-4335-BF67-22EF79A7EB69}" type="datetimeFigureOut">
+            <a:fld id="{F04E7869-5D3E-4D61-9500-F031EB31109A}" type="datetimeFigureOut">
               <a:rPr kumimoji="1" lang="ja-JP" altLang="en-US" smtClean="0"/>
               <a:t>2026/7/30</a:t>
             </a:fld>
@@ -2647,7 +2647,7 @@
           <p:cNvPr id="6" name="フッター プレースホルダー 5">
             <a:extLst>
               <a:ext uri="{FF2B5EF4-FFF2-40B4-BE49-F238E27FC236}">
-                <a16:creationId xmlns:a16="http://schemas.microsoft.com/office/drawing/2014/main" id="{D3AB966C-0F5A-BF4D-2800-7E50FF057227}"/>
+                <a16:creationId xmlns:a16="http://schemas.microsoft.com/office/drawing/2014/main" id="{D28EF219-FD90-6075-73F3-E954465E070E}"/>
               </a:ext>
             </a:extLst>
           </p:cNvPr>
@@ -2672,7 +2672,7 @@
           <p:cNvPr id="7" name="スライド番号プレースホルダー 6">
             <a:extLst>
               <a:ext uri="{FF2B5EF4-FFF2-40B4-BE49-F238E27FC236}">
-                <a16:creationId xmlns:a16="http://schemas.microsoft.com/office/drawing/2014/main" id="{FE883EDB-11C7-B665-6304-2392F26A1967}"/>
+                <a16:creationId xmlns:a16="http://schemas.microsoft.com/office/drawing/2014/main" id="{F1413D4E-A344-9B01-9743-E8D5A90C4C0C}"/>
               </a:ext>
             </a:extLst>
           </p:cNvPr>
@@ -2688,7 +2688,7 @@
           <a:bodyPr/>
           <a:lstStyle/>
           <a:p>
-            <a:fld id="{7C2052BB-089E-4BCF-A79B-67846E7B6111}" type="slidenum">
+            <a:fld id="{600A2B23-CD1C-44B4-B5A4-536257EE75C8}" type="slidenum">
               <a:rPr kumimoji="1" lang="ja-JP" altLang="en-US" smtClean="0"/>
               <a:t>‹#›</a:t>
             </a:fld>
@@ -2699,7 +2699,7 @@
     </p:spTree>
     <p:extLst>
       <p:ext uri="{BB962C8B-B14F-4D97-AF65-F5344CB8AC3E}">
-        <p14:creationId xmlns:p14="http://schemas.microsoft.com/office/powerpoint/2010/main" val="1507064575"/>
+        <p14:creationId xmlns:p14="http://schemas.microsoft.com/office/powerpoint/2010/main" val="3979329975"/>
       </p:ext>
     </p:extLst>
   </p:cSld>
@@ -2731,7 +2731,7 @@
           <p:cNvPr id="2" name="タイトル 1">
             <a:extLst>
               <a:ext uri="{FF2B5EF4-FFF2-40B4-BE49-F238E27FC236}">
-                <a16:creationId xmlns:a16="http://schemas.microsoft.com/office/drawing/2014/main" id="{639E4A9D-DCAD-413F-5A0F-B445E940D8A7}"/>
+                <a16:creationId xmlns:a16="http://schemas.microsoft.com/office/drawing/2014/main" id="{82FF04D0-0F0D-276A-5830-F1D73EF9AA9F}"/>
               </a:ext>
             </a:extLst>
           </p:cNvPr>
@@ -2768,7 +2768,7 @@
           <p:cNvPr id="3" name="図プレースホルダー 2">
             <a:extLst>
               <a:ext uri="{FF2B5EF4-FFF2-40B4-BE49-F238E27FC236}">
-                <a16:creationId xmlns:a16="http://schemas.microsoft.com/office/drawing/2014/main" id="{E722FDE1-E1B2-2F6C-F5AC-E4739C30BE60}"/>
+                <a16:creationId xmlns:a16="http://schemas.microsoft.com/office/drawing/2014/main" id="{A1067A98-58AD-64D3-7894-FA554FF5314D}"/>
               </a:ext>
             </a:extLst>
           </p:cNvPr>
@@ -2835,7 +2835,7 @@
           <p:cNvPr id="4" name="テキスト プレースホルダー 3">
             <a:extLst>
               <a:ext uri="{FF2B5EF4-FFF2-40B4-BE49-F238E27FC236}">
-                <a16:creationId xmlns:a16="http://schemas.microsoft.com/office/drawing/2014/main" id="{A0F216EE-59A4-5F02-B59B-49807B83169E}"/>
+                <a16:creationId xmlns:a16="http://schemas.microsoft.com/office/drawing/2014/main" id="{82A315C6-DA89-976E-8C07-514FCD676591}"/>
               </a:ext>
             </a:extLst>
           </p:cNvPr>
@@ -2906,7 +2906,7 @@
           <p:cNvPr id="5" name="日付プレースホルダー 4">
             <a:extLst>
               <a:ext uri="{FF2B5EF4-FFF2-40B4-BE49-F238E27FC236}">
-                <a16:creationId xmlns:a16="http://schemas.microsoft.com/office/drawing/2014/main" id="{DA482122-B1D6-BB2C-2099-F6058155844D}"/>
+                <a16:creationId xmlns:a16="http://schemas.microsoft.com/office/drawing/2014/main" id="{CD9D7BBD-CE4E-7367-0348-C93FB9322234}"/>
               </a:ext>
             </a:extLst>
           </p:cNvPr>
@@ -2922,7 +2922,7 @@
           <a:bodyPr/>
           <a:lstStyle/>
           <a:p>
-            <a:fld id="{1FEAEA19-90D4-4335-BF67-22EF79A7EB69}" type="datetimeFigureOut">
+            <a:fld id="{F04E7869-5D3E-4D61-9500-F031EB31109A}" type="datetimeFigureOut">
               <a:rPr kumimoji="1" lang="ja-JP" altLang="en-US" smtClean="0"/>
               <a:t>2026/7/30</a:t>
             </a:fld>
@@ -2935,7 +2935,7 @@
           <p:cNvPr id="6" name="フッター プレースホルダー 5">
             <a:extLst>
               <a:ext uri="{FF2B5EF4-FFF2-40B4-BE49-F238E27FC236}">
-                <a16:creationId xmlns:a16="http://schemas.microsoft.com/office/drawing/2014/main" id="{7CBD4B32-B9D5-D561-03A4-F35B6CB5F906}"/>
+                <a16:creationId xmlns:a16="http://schemas.microsoft.com/office/drawing/2014/main" id="{CC27D515-A9AB-0561-84DB-1084E5D6B63F}"/>
               </a:ext>
             </a:extLst>
           </p:cNvPr>
@@ -2960,7 +2960,7 @@
           <p:cNvPr id="7" name="スライド番号プレースホルダー 6">
             <a:extLst>
               <a:ext uri="{FF2B5EF4-FFF2-40B4-BE49-F238E27FC236}">
-                <a16:creationId xmlns:a16="http://schemas.microsoft.com/office/drawing/2014/main" id="{8ECB86E2-CBE5-143E-7A3B-7A14CEA75587}"/>
+                <a16:creationId xmlns:a16="http://schemas.microsoft.com/office/drawing/2014/main" id="{37CAFFB9-9635-096F-DE66-ED469C1A0A68}"/>
               </a:ext>
             </a:extLst>
           </p:cNvPr>
@@ -2976,7 +2976,7 @@
           <a:bodyPr/>
           <a:lstStyle/>
           <a:p>
-            <a:fld id="{7C2052BB-089E-4BCF-A79B-67846E7B6111}" type="slidenum">
+            <a:fld id="{600A2B23-CD1C-44B4-B5A4-536257EE75C8}" type="slidenum">
               <a:rPr kumimoji="1" lang="ja-JP" altLang="en-US" smtClean="0"/>
               <a:t>‹#›</a:t>
             </a:fld>
@@ -2987,7 +2987,7 @@
     </p:spTree>
     <p:extLst>
       <p:ext uri="{BB962C8B-B14F-4D97-AF65-F5344CB8AC3E}">
-        <p14:creationId xmlns:p14="http://schemas.microsoft.com/office/powerpoint/2010/main" val="776736987"/>
+        <p14:creationId xmlns:p14="http://schemas.microsoft.com/office/powerpoint/2010/main" val="3605039868"/>
       </p:ext>
     </p:extLst>
   </p:cSld>
@@ -3024,7 +3024,7 @@
           <p:cNvPr id="2" name="タイトル プレースホルダー 1">
             <a:extLst>
               <a:ext uri="{FF2B5EF4-FFF2-40B4-BE49-F238E27FC236}">
-                <a16:creationId xmlns:a16="http://schemas.microsoft.com/office/drawing/2014/main" id="{FED6FF84-8CD3-E55A-36B0-F48AFDC09B5D}"/>
+                <a16:creationId xmlns:a16="http://schemas.microsoft.com/office/drawing/2014/main" id="{479C054C-F8F8-3CDC-3A5F-CF8DE2FE816D}"/>
               </a:ext>
             </a:extLst>
           </p:cNvPr>
@@ -3062,7 +3062,7 @@
           <p:cNvPr id="3" name="テキスト プレースホルダー 2">
             <a:extLst>
               <a:ext uri="{FF2B5EF4-FFF2-40B4-BE49-F238E27FC236}">
-                <a16:creationId xmlns:a16="http://schemas.microsoft.com/office/drawing/2014/main" id="{558730E0-09A1-D982-FECD-80E565D3F80E}"/>
+                <a16:creationId xmlns:a16="http://schemas.microsoft.com/office/drawing/2014/main" id="{C22412D2-9071-AD37-4FCA-A7B96F5DB465}"/>
               </a:ext>
             </a:extLst>
           </p:cNvPr>
@@ -3161,7 +3161,7 @@
           <p:cNvPr id="4" name="日付プレースホルダー 3">
             <a:extLst>
               <a:ext uri="{FF2B5EF4-FFF2-40B4-BE49-F238E27FC236}">
-                <a16:creationId xmlns:a16="http://schemas.microsoft.com/office/drawing/2014/main" id="{B1255CC6-40FE-7E6B-304F-723BA23CAC12}"/>
+                <a16:creationId xmlns:a16="http://schemas.microsoft.com/office/drawing/2014/main" id="{92C9E186-F6BB-264E-974D-878C39561F77}"/>
               </a:ext>
             </a:extLst>
           </p:cNvPr>
@@ -3195,7 +3195,7 @@
             </a:lvl1pPr>
           </a:lstStyle>
           <a:p>
-            <a:fld id="{1FEAEA19-90D4-4335-BF67-22EF79A7EB69}" type="datetimeFigureOut">
+            <a:fld id="{F04E7869-5D3E-4D61-9500-F031EB31109A}" type="datetimeFigureOut">
               <a:rPr kumimoji="1" lang="ja-JP" altLang="en-US" smtClean="0"/>
               <a:t>2026/7/30</a:t>
             </a:fld>
@@ -3208,7 +3208,7 @@
           <p:cNvPr id="5" name="フッター プレースホルダー 4">
             <a:extLst>
               <a:ext uri="{FF2B5EF4-FFF2-40B4-BE49-F238E27FC236}">
-                <a16:creationId xmlns:a16="http://schemas.microsoft.com/office/drawing/2014/main" id="{4763EA16-B5EE-65D2-9240-0E445B586B45}"/>
+                <a16:creationId xmlns:a16="http://schemas.microsoft.com/office/drawing/2014/main" id="{665A8F57-1629-B982-8154-EDBF6D71D50E}"/>
               </a:ext>
             </a:extLst>
           </p:cNvPr>
@@ -3251,7 +3251,7 @@
           <p:cNvPr id="6" name="スライド番号プレースホルダー 5">
             <a:extLst>
               <a:ext uri="{FF2B5EF4-FFF2-40B4-BE49-F238E27FC236}">
-                <a16:creationId xmlns:a16="http://schemas.microsoft.com/office/drawing/2014/main" id="{9878E8C3-07B7-AEFA-3D18-6B988B2DDD33}"/>
+                <a16:creationId xmlns:a16="http://schemas.microsoft.com/office/drawing/2014/main" id="{86F4A094-BC64-F394-0296-5D30F812BBD5}"/>
               </a:ext>
             </a:extLst>
           </p:cNvPr>
@@ -3285,7 +3285,7 @@
             </a:lvl1pPr>
           </a:lstStyle>
           <a:p>
-            <a:fld id="{7C2052BB-089E-4BCF-A79B-67846E7B6111}" type="slidenum">
+            <a:fld id="{600A2B23-CD1C-44B4-B5A4-536257EE75C8}" type="slidenum">
               <a:rPr kumimoji="1" lang="ja-JP" altLang="en-US" smtClean="0"/>
               <a:t>‹#›</a:t>
             </a:fld>
@@ -3296,7 +3296,7 @@
     </p:spTree>
     <p:extLst>
       <p:ext uri="{BB962C8B-B14F-4D97-AF65-F5344CB8AC3E}">
-        <p14:creationId xmlns:p14="http://schemas.microsoft.com/office/powerpoint/2010/main" val="3830398616"/>
+        <p14:creationId xmlns:p14="http://schemas.microsoft.com/office/powerpoint/2010/main" val="2159928923"/>
       </p:ext>
     </p:extLst>
   </p:cSld>
@@ -3619,7 +3619,7 @@
           <p:cNvPr id="2" name="テキスト ボックス 1">
             <a:extLst>
               <a:ext uri="{FF2B5EF4-FFF2-40B4-BE49-F238E27FC236}">
-                <a16:creationId xmlns:a16="http://schemas.microsoft.com/office/drawing/2014/main" id="{3F68A859-DC1F-8490-5D2C-CF415332BF38}"/>
+                <a16:creationId xmlns:a16="http://schemas.microsoft.com/office/drawing/2014/main" id="{406D6BC4-28AD-6F9F-45FA-310C693EF9A3}"/>
               </a:ext>
             </a:extLst>
           </p:cNvPr>
@@ -3665,7 +3665,7 @@
           <p:cNvPr id="3" name="テキスト ボックス 2">
             <a:extLst>
               <a:ext uri="{FF2B5EF4-FFF2-40B4-BE49-F238E27FC236}">
-                <a16:creationId xmlns:a16="http://schemas.microsoft.com/office/drawing/2014/main" id="{374734DA-DF02-9751-AEAB-6325D34360FD}"/>
+                <a16:creationId xmlns:a16="http://schemas.microsoft.com/office/drawing/2014/main" id="{5A6BB856-DE78-AF98-4397-2F32C5ABF13B}"/>
               </a:ext>
             </a:extLst>
           </p:cNvPr>
@@ -3695,14 +3695,17 @@
                 </a:solidFill>
                 <a:latin typeface="Arial" panose="020B0604020202020204" pitchFamily="34" charset="0"/>
               </a:rPr>
-              <a:t>leaflet-web1 TECH EXPLANATION</a:t>
-            </a:r>
-            <a:endParaRPr kumimoji="1" lang="ja-JP" altLang="en-US" sz="3400" b="1">
-              <a:solidFill>
-                <a:srgbClr val="111111"/>
-              </a:solidFill>
-              <a:latin typeface="Arial" panose="020B0604020202020204" pitchFamily="34" charset="0"/>
-            </a:endParaRPr>
+              <a:t>Leaflet Web1</a:t>
+            </a:r>
+            <a:r>
+              <a:rPr kumimoji="1" lang="ja-JP" altLang="en-US" sz="3400" b="1">
+                <a:solidFill>
+                  <a:srgbClr val="111111"/>
+                </a:solidFill>
+                <a:latin typeface="Arial" panose="020B0604020202020204" pitchFamily="34" charset="0"/>
+              </a:rPr>
+              <a:t>の技術解説</a:t>
+            </a:r>
           </a:p>
         </p:txBody>
       </p:sp>
@@ -3711,7 +3714,7 @@
           <p:cNvPr id="4" name="テキスト ボックス 3">
             <a:extLst>
               <a:ext uri="{FF2B5EF4-FFF2-40B4-BE49-F238E27FC236}">
-                <a16:creationId xmlns:a16="http://schemas.microsoft.com/office/drawing/2014/main" id="{F3859898-44FA-264A-CA46-53EBE8A69FBD}"/>
+                <a16:creationId xmlns:a16="http://schemas.microsoft.com/office/drawing/2014/main" id="{F4599F29-B65D-E855-01A6-A900BAB3CF72}"/>
               </a:ext>
             </a:extLst>
           </p:cNvPr>
@@ -3735,20 +3738,14 @@
           <a:lstStyle/>
           <a:p>
             <a:r>
-              <a:rPr kumimoji="1" lang="en-US" altLang="ja-JP" sz="2000">
+              <a:rPr kumimoji="1" lang="ja-JP" altLang="en-US" sz="2000">
                 <a:solidFill>
                   <a:srgbClr val="333333"/>
                 </a:solidFill>
                 <a:latin typeface="Arial" panose="020B0604020202020204" pitchFamily="34" charset="0"/>
               </a:rPr>
-              <a:t>Architecture, implementation and commit history in 75 seconds</a:t>
-            </a:r>
-            <a:endParaRPr kumimoji="1" lang="ja-JP" altLang="en-US" sz="2000">
-              <a:solidFill>
-                <a:srgbClr val="333333"/>
-              </a:solidFill>
-              <a:latin typeface="Arial" panose="020B0604020202020204" pitchFamily="34" charset="0"/>
-            </a:endParaRPr>
+              <a:t>設計・実装・コミットから学ぶ短時間プレビュー</a:t>
+            </a:r>
           </a:p>
         </p:txBody>
       </p:sp>
@@ -3757,7 +3754,7 @@
           <p:cNvPr id="5" name="テキスト ボックス 4">
             <a:extLst>
               <a:ext uri="{FF2B5EF4-FFF2-40B4-BE49-F238E27FC236}">
-                <a16:creationId xmlns:a16="http://schemas.microsoft.com/office/drawing/2014/main" id="{77CEFD6B-BDDF-4F8B-9D89-B567E469F184}"/>
+                <a16:creationId xmlns:a16="http://schemas.microsoft.com/office/drawing/2014/main" id="{8E03F15C-56DA-753C-EABF-7B0649539EEA}"/>
               </a:ext>
             </a:extLst>
           </p:cNvPr>
@@ -3804,7 +3801,7 @@
             <a:hlinkClick r:id="" action="ppaction://media"/>
             <a:extLst>
               <a:ext uri="{FF2B5EF4-FFF2-40B4-BE49-F238E27FC236}">
-                <a16:creationId xmlns:a16="http://schemas.microsoft.com/office/drawing/2014/main" id="{475BCD21-6B14-B013-E716-ADDF0BF82B37}"/>
+                <a16:creationId xmlns:a16="http://schemas.microsoft.com/office/drawing/2014/main" id="{E4790099-07DB-93FD-4446-C1208E5610A1}"/>
               </a:ext>
             </a:extLst>
           </p:cNvPr>
@@ -3839,7 +3836,7 @@
     </p:spTree>
     <p:extLst>
       <p:ext uri="{BB962C8B-B14F-4D97-AF65-F5344CB8AC3E}">
-        <p14:creationId xmlns:p14="http://schemas.microsoft.com/office/powerpoint/2010/main" val="1165545019"/>
+        <p14:creationId xmlns:p14="http://schemas.microsoft.com/office/powerpoint/2010/main" val="94903802"/>
       </p:ext>
     </p:extLst>
   </p:cSld>
@@ -3963,7 +3960,7 @@
           <p:cNvPr id="2" name="テキスト ボックス 1">
             <a:extLst>
               <a:ext uri="{FF2B5EF4-FFF2-40B4-BE49-F238E27FC236}">
-                <a16:creationId xmlns:a16="http://schemas.microsoft.com/office/drawing/2014/main" id="{433F7109-D624-FEBE-13D2-E4C2B2C41B9D}"/>
+                <a16:creationId xmlns:a16="http://schemas.microsoft.com/office/drawing/2014/main" id="{BFEAFF20-D932-D5BE-23C5-0CBFA9AF5935}"/>
               </a:ext>
             </a:extLst>
           </p:cNvPr>
@@ -4009,7 +4006,7 @@
           <p:cNvPr id="3" name="テキスト ボックス 2">
             <a:extLst>
               <a:ext uri="{FF2B5EF4-FFF2-40B4-BE49-F238E27FC236}">
-                <a16:creationId xmlns:a16="http://schemas.microsoft.com/office/drawing/2014/main" id="{B0F9EF97-8A05-E721-B45A-1EA94D9A3744}"/>
+                <a16:creationId xmlns:a16="http://schemas.microsoft.com/office/drawing/2014/main" id="{47014159-A52B-FEFE-8E13-3B159C759DA4}"/>
               </a:ext>
             </a:extLst>
           </p:cNvPr>
@@ -4033,20 +4030,14 @@
           <a:lstStyle/>
           <a:p>
             <a:r>
-              <a:rPr kumimoji="1" lang="en-US" altLang="ja-JP" sz="3400" b="1">
+              <a:rPr kumimoji="1" lang="ja-JP" altLang="en-US" sz="3400" b="1">
                 <a:solidFill>
                   <a:srgbClr val="111111"/>
                 </a:solidFill>
                 <a:latin typeface="Arial" panose="020B0604020202020204" pitchFamily="34" charset="0"/>
               </a:rPr>
-              <a:t>WHAT DOES IT SOLVE?</a:t>
-            </a:r>
-            <a:endParaRPr kumimoji="1" lang="ja-JP" altLang="en-US" sz="3400" b="1">
-              <a:solidFill>
-                <a:srgbClr val="111111"/>
-              </a:solidFill>
-              <a:latin typeface="Arial" panose="020B0604020202020204" pitchFamily="34" charset="0"/>
-            </a:endParaRPr>
+              <a:t>このプロジェクトは何を解決する？</a:t>
+            </a:r>
           </a:p>
         </p:txBody>
       </p:sp>
@@ -4055,7 +4046,7 @@
           <p:cNvPr id="4" name="テキスト ボックス 3">
             <a:extLst>
               <a:ext uri="{FF2B5EF4-FFF2-40B4-BE49-F238E27FC236}">
-                <a16:creationId xmlns:a16="http://schemas.microsoft.com/office/drawing/2014/main" id="{32F8F3CD-AA4E-82DB-1771-C66BBE632FFD}"/>
+                <a16:creationId xmlns:a16="http://schemas.microsoft.com/office/drawing/2014/main" id="{FFD9C058-3081-3DC4-24E4-23268B6FEBA9}"/>
               </a:ext>
             </a:extLst>
           </p:cNvPr>
@@ -4140,7 +4131,7 @@
           <p:cNvPr id="5" name="テキスト ボックス 4">
             <a:extLst>
               <a:ext uri="{FF2B5EF4-FFF2-40B4-BE49-F238E27FC236}">
-                <a16:creationId xmlns:a16="http://schemas.microsoft.com/office/drawing/2014/main" id="{06549A08-B596-DE40-B99E-FD6736E33723}"/>
+                <a16:creationId xmlns:a16="http://schemas.microsoft.com/office/drawing/2014/main" id="{6B624D1B-3D93-3B92-F6FF-B65A628499B7}"/>
               </a:ext>
             </a:extLst>
           </p:cNvPr>
@@ -4187,7 +4178,7 @@
             <a:hlinkClick r:id="" action="ppaction://media"/>
             <a:extLst>
               <a:ext uri="{FF2B5EF4-FFF2-40B4-BE49-F238E27FC236}">
-                <a16:creationId xmlns:a16="http://schemas.microsoft.com/office/drawing/2014/main" id="{ECADB79E-437C-5D22-C232-E24A98902A50}"/>
+                <a16:creationId xmlns:a16="http://schemas.microsoft.com/office/drawing/2014/main" id="{97AF261D-207C-059B-D7A1-8E3006C7943D}"/>
               </a:ext>
             </a:extLst>
           </p:cNvPr>
@@ -4222,7 +4213,7 @@
     </p:spTree>
     <p:extLst>
       <p:ext uri="{BB962C8B-B14F-4D97-AF65-F5344CB8AC3E}">
-        <p14:creationId xmlns:p14="http://schemas.microsoft.com/office/powerpoint/2010/main" val="1977699671"/>
+        <p14:creationId xmlns:p14="http://schemas.microsoft.com/office/powerpoint/2010/main" val="776261791"/>
       </p:ext>
     </p:extLst>
   </p:cSld>
@@ -4346,7 +4337,7 @@
           <p:cNvPr id="2" name="テキスト ボックス 1">
             <a:extLst>
               <a:ext uri="{FF2B5EF4-FFF2-40B4-BE49-F238E27FC236}">
-                <a16:creationId xmlns:a16="http://schemas.microsoft.com/office/drawing/2014/main" id="{278C2998-6AD2-F94F-86C8-40A118C52F82}"/>
+                <a16:creationId xmlns:a16="http://schemas.microsoft.com/office/drawing/2014/main" id="{72BA9F24-5D16-9581-E79C-B14FF4F24425}"/>
               </a:ext>
             </a:extLst>
           </p:cNvPr>
@@ -4392,7 +4383,7 @@
           <p:cNvPr id="3" name="テキスト ボックス 2">
             <a:extLst>
               <a:ext uri="{FF2B5EF4-FFF2-40B4-BE49-F238E27FC236}">
-                <a16:creationId xmlns:a16="http://schemas.microsoft.com/office/drawing/2014/main" id="{3F3675FA-1CB7-4F88-0D5F-A21667B838CB}"/>
+                <a16:creationId xmlns:a16="http://schemas.microsoft.com/office/drawing/2014/main" id="{F60354CC-320C-5A2E-6DA0-35B8E276BE0C}"/>
               </a:ext>
             </a:extLst>
           </p:cNvPr>
@@ -4416,20 +4407,14 @@
           <a:lstStyle/>
           <a:p>
             <a:r>
-              <a:rPr kumimoji="1" lang="en-US" altLang="ja-JP" sz="3400" b="1">
+              <a:rPr kumimoji="1" lang="ja-JP" altLang="en-US" sz="3400" b="1">
                 <a:solidFill>
                   <a:srgbClr val="111111"/>
                 </a:solidFill>
                 <a:latin typeface="Arial" panose="020B0604020202020204" pitchFamily="34" charset="0"/>
               </a:rPr>
-              <a:t>TECH STACK</a:t>
-            </a:r>
-            <a:endParaRPr kumimoji="1" lang="ja-JP" altLang="en-US" sz="3400" b="1">
-              <a:solidFill>
-                <a:srgbClr val="111111"/>
-              </a:solidFill>
-              <a:latin typeface="Arial" panose="020B0604020202020204" pitchFamily="34" charset="0"/>
-            </a:endParaRPr>
+              <a:t>技術スタック</a:t>
+            </a:r>
           </a:p>
         </p:txBody>
       </p:sp>
@@ -4438,7 +4423,7 @@
           <p:cNvPr id="4" name="テキスト ボックス 3">
             <a:extLst>
               <a:ext uri="{FF2B5EF4-FFF2-40B4-BE49-F238E27FC236}">
-                <a16:creationId xmlns:a16="http://schemas.microsoft.com/office/drawing/2014/main" id="{67794A1D-9C93-C751-2FA1-876A8489CB00}"/>
+                <a16:creationId xmlns:a16="http://schemas.microsoft.com/office/drawing/2014/main" id="{4E00A1EC-91DD-9E91-BF3A-A62E655B0F0E}"/>
               </a:ext>
             </a:extLst>
           </p:cNvPr>
@@ -4448,7 +4433,7 @@
         <p:spPr>
           <a:xfrm>
             <a:off x="533400" y="3429000"/>
-            <a:ext cx="10795000" cy="400110"/>
+            <a:ext cx="10795000" cy="707886"/>
           </a:xfrm>
           <a:prstGeom prst="rect">
             <a:avLst/>
@@ -4462,13 +4447,22 @@
           <a:lstStyle/>
           <a:p>
             <a:r>
+              <a:rPr kumimoji="1" lang="ja-JP" altLang="en-US" sz="2000">
+                <a:solidFill>
+                  <a:srgbClr val="333333"/>
+                </a:solidFill>
+                <a:latin typeface="Arial" panose="020B0604020202020204" pitchFamily="34" charset="0"/>
+              </a:rPr>
+              <a:t>主要技術：</a:t>
+            </a:r>
+            <a:r>
               <a:rPr kumimoji="1" lang="en-US" altLang="ja-JP" sz="2000">
                 <a:solidFill>
                   <a:srgbClr val="333333"/>
                 </a:solidFill>
                 <a:latin typeface="Arial" panose="020B0604020202020204" pitchFamily="34" charset="0"/>
               </a:rPr>
-              <a:t>Primary technologies: TypeScript</a:t>
+              <a:t>TypeScript</a:t>
             </a:r>
             <a:r>
               <a:rPr kumimoji="1" lang="ja-JP" altLang="en-US" sz="2000">
@@ -4486,14 +4480,18 @@
                 </a:solidFill>
                 <a:latin typeface="Arial" panose="020B0604020202020204" pitchFamily="34" charset="0"/>
               </a:rPr>
-              <a:t>JavaScript</a:t>
-            </a:r>
-            <a:endParaRPr kumimoji="1" lang="ja-JP" altLang="en-US" sz="2000">
-              <a:solidFill>
-                <a:srgbClr val="333333"/>
-              </a:solidFill>
-              <a:latin typeface="Arial" panose="020B0604020202020204" pitchFamily="34" charset="0"/>
-            </a:endParaRPr>
+              <a:t>JavaScript
+</a:t>
+            </a:r>
+            <a:r>
+              <a:rPr kumimoji="1" lang="ja-JP" altLang="en-US" sz="2000">
+                <a:solidFill>
+                  <a:srgbClr val="333333"/>
+                </a:solidFill>
+                <a:latin typeface="Arial" panose="020B0604020202020204" pitchFamily="34" charset="0"/>
+              </a:rPr>
+              <a:t>役割を分け、保守しやすい構成を目指しています。</a:t>
+            </a:r>
           </a:p>
         </p:txBody>
       </p:sp>
@@ -4502,7 +4500,7 @@
           <p:cNvPr id="5" name="テキスト ボックス 4">
             <a:extLst>
               <a:ext uri="{FF2B5EF4-FFF2-40B4-BE49-F238E27FC236}">
-                <a16:creationId xmlns:a16="http://schemas.microsoft.com/office/drawing/2014/main" id="{3FEC8050-BAA3-2ABC-D99F-368DD4DBF9C3}"/>
+                <a16:creationId xmlns:a16="http://schemas.microsoft.com/office/drawing/2014/main" id="{6516A0D5-179E-0F24-E452-E27AF2327841}"/>
               </a:ext>
             </a:extLst>
           </p:cNvPr>
@@ -4549,7 +4547,7 @@
             <a:hlinkClick r:id="" action="ppaction://media"/>
             <a:extLst>
               <a:ext uri="{FF2B5EF4-FFF2-40B4-BE49-F238E27FC236}">
-                <a16:creationId xmlns:a16="http://schemas.microsoft.com/office/drawing/2014/main" id="{AC7719B4-F242-72EB-FB8D-BA0701F33D88}"/>
+                <a16:creationId xmlns:a16="http://schemas.microsoft.com/office/drawing/2014/main" id="{BF1C7793-95EE-02DF-1E98-6F3372C84CD6}"/>
               </a:ext>
             </a:extLst>
           </p:cNvPr>
@@ -4584,7 +4582,7 @@
     </p:spTree>
     <p:extLst>
       <p:ext uri="{BB962C8B-B14F-4D97-AF65-F5344CB8AC3E}">
-        <p14:creationId xmlns:p14="http://schemas.microsoft.com/office/powerpoint/2010/main" val="2517459458"/>
+        <p14:creationId xmlns:p14="http://schemas.microsoft.com/office/powerpoint/2010/main" val="1371685764"/>
       </p:ext>
     </p:extLst>
   </p:cSld>
@@ -4708,7 +4706,7 @@
           <p:cNvPr id="2" name="テキスト ボックス 1">
             <a:extLst>
               <a:ext uri="{FF2B5EF4-FFF2-40B4-BE49-F238E27FC236}">
-                <a16:creationId xmlns:a16="http://schemas.microsoft.com/office/drawing/2014/main" id="{9409B32D-8F13-4BB1-82E2-07A208A52967}"/>
+                <a16:creationId xmlns:a16="http://schemas.microsoft.com/office/drawing/2014/main" id="{BAB33801-CBDD-F18D-C427-894B56B9CE10}"/>
               </a:ext>
             </a:extLst>
           </p:cNvPr>
@@ -4754,7 +4752,7 @@
           <p:cNvPr id="3" name="テキスト ボックス 2">
             <a:extLst>
               <a:ext uri="{FF2B5EF4-FFF2-40B4-BE49-F238E27FC236}">
-                <a16:creationId xmlns:a16="http://schemas.microsoft.com/office/drawing/2014/main" id="{519257D6-EA0B-5A25-AA91-DA22003F557E}"/>
+                <a16:creationId xmlns:a16="http://schemas.microsoft.com/office/drawing/2014/main" id="{72D47C6E-D666-D2C9-AF12-68EF2BEE8879}"/>
               </a:ext>
             </a:extLst>
           </p:cNvPr>
@@ -4778,20 +4776,14 @@
           <a:lstStyle/>
           <a:p>
             <a:r>
-              <a:rPr kumimoji="1" lang="en-US" altLang="ja-JP" sz="3400" b="1">
+              <a:rPr kumimoji="1" lang="ja-JP" altLang="en-US" sz="3400" b="1">
                 <a:solidFill>
                   <a:srgbClr val="111111"/>
                 </a:solidFill>
                 <a:latin typeface="Arial" panose="020B0604020202020204" pitchFamily="34" charset="0"/>
               </a:rPr>
-              <a:t>REPOSITORY HIGHLIGHTS</a:t>
-            </a:r>
-            <a:endParaRPr kumimoji="1" lang="ja-JP" altLang="en-US" sz="3400" b="1">
-              <a:solidFill>
-                <a:srgbClr val="111111"/>
-              </a:solidFill>
-              <a:latin typeface="Arial" panose="020B0604020202020204" pitchFamily="34" charset="0"/>
-            </a:endParaRPr>
+              <a:t>リポジトリの読みどころ</a:t>
+            </a:r>
           </a:p>
         </p:txBody>
       </p:sp>
@@ -4800,7 +4792,7 @@
           <p:cNvPr id="4" name="テキスト ボックス 3">
             <a:extLst>
               <a:ext uri="{FF2B5EF4-FFF2-40B4-BE49-F238E27FC236}">
-                <a16:creationId xmlns:a16="http://schemas.microsoft.com/office/drawing/2014/main" id="{4328749D-A5DC-98D3-0B50-44F8DD6754AC}"/>
+                <a16:creationId xmlns:a16="http://schemas.microsoft.com/office/drawing/2014/main" id="{D06F5AF2-88AA-C88F-D6D9-031D6801A858}"/>
               </a:ext>
             </a:extLst>
           </p:cNvPr>
@@ -4810,7 +4802,7 @@
         <p:spPr>
           <a:xfrm>
             <a:off x="533400" y="3429000"/>
-            <a:ext cx="10795000" cy="400110"/>
+            <a:ext cx="10795000" cy="707886"/>
           </a:xfrm>
           <a:prstGeom prst="rect">
             <a:avLst/>
@@ -4824,13 +4816,77 @@
           <a:lstStyle/>
           <a:p>
             <a:r>
+              <a:rPr kumimoji="1" lang="ja-JP" altLang="en-US" sz="2000">
+                <a:solidFill>
+                  <a:srgbClr val="333333"/>
+                </a:solidFill>
+                <a:latin typeface="Arial" panose="020B0604020202020204" pitchFamily="34" charset="0"/>
+              </a:rPr>
+              <a:t>公開コード、</a:t>
+            </a:r>
+            <a:r>
               <a:rPr kumimoji="1" lang="en-US" altLang="ja-JP" sz="2000">
                 <a:solidFill>
                   <a:srgbClr val="333333"/>
                 </a:solidFill>
                 <a:latin typeface="Arial" panose="020B0604020202020204" pitchFamily="34" charset="0"/>
               </a:rPr>
-              <a:t>Public source code, README and commit history reveal the design decisions.</a:t>
+              <a:t>README</a:t>
+            </a:r>
+            <a:r>
+              <a:rPr kumimoji="1" lang="ja-JP" altLang="en-US" sz="2000">
+                <a:solidFill>
+                  <a:srgbClr val="333333"/>
+                </a:solidFill>
+                <a:latin typeface="Arial" panose="020B0604020202020204" pitchFamily="34" charset="0"/>
+              </a:rPr>
+              <a:t>、コミット履歴から設計判断を確認できます。
+主なファイル：</a:t>
+            </a:r>
+            <a:r>
+              <a:rPr kumimoji="1" lang="en-US" altLang="ja-JP" sz="2000">
+                <a:solidFill>
+                  <a:srgbClr val="333333"/>
+                </a:solidFill>
+                <a:latin typeface="Arial" panose="020B0604020202020204" pitchFamily="34" charset="0"/>
+              </a:rPr>
+              <a:t>README.md</a:t>
+            </a:r>
+            <a:r>
+              <a:rPr kumimoji="1" lang="ja-JP" altLang="en-US" sz="2000">
+                <a:solidFill>
+                  <a:srgbClr val="333333"/>
+                </a:solidFill>
+                <a:latin typeface="Arial" panose="020B0604020202020204" pitchFamily="34" charset="0"/>
+              </a:rPr>
+              <a:t>、</a:t>
+            </a:r>
+            <a:r>
+              <a:rPr kumimoji="1" lang="en-US" altLang="ja-JP" sz="2000">
+                <a:solidFill>
+                  <a:srgbClr val="333333"/>
+                </a:solidFill>
+                <a:latin typeface="Arial" panose="020B0604020202020204" pitchFamily="34" charset="0"/>
+              </a:rPr>
+              <a:t>app</a:t>
+            </a:r>
+            <a:r>
+              <a:rPr kumimoji="1" lang="ja-JP" altLang="en-US" sz="2000">
+                <a:solidFill>
+                  <a:srgbClr val="333333"/>
+                </a:solidFill>
+                <a:latin typeface="Arial" panose="020B0604020202020204" pitchFamily="34" charset="0"/>
+              </a:rPr>
+              <a:t>、</a:t>
+            </a:r>
+            <a:r>
+              <a:rPr kumimoji="1" lang="en-US" altLang="ja-JP" sz="2000">
+                <a:solidFill>
+                  <a:srgbClr val="333333"/>
+                </a:solidFill>
+                <a:latin typeface="Arial" panose="020B0604020202020204" pitchFamily="34" charset="0"/>
+              </a:rPr>
+              <a:t>build</a:t>
             </a:r>
             <a:endParaRPr kumimoji="1" lang="ja-JP" altLang="en-US" sz="2000">
               <a:solidFill>
@@ -4846,7 +4902,7 @@
           <p:cNvPr id="5" name="テキスト ボックス 4">
             <a:extLst>
               <a:ext uri="{FF2B5EF4-FFF2-40B4-BE49-F238E27FC236}">
-                <a16:creationId xmlns:a16="http://schemas.microsoft.com/office/drawing/2014/main" id="{8D2A053C-B972-48FB-EE99-FD0E6862CB9A}"/>
+                <a16:creationId xmlns:a16="http://schemas.microsoft.com/office/drawing/2014/main" id="{3B742B59-416A-0672-654F-E8481BEAFFC5}"/>
               </a:ext>
             </a:extLst>
           </p:cNvPr>
@@ -4893,7 +4949,7 @@
             <a:hlinkClick r:id="" action="ppaction://media"/>
             <a:extLst>
               <a:ext uri="{FF2B5EF4-FFF2-40B4-BE49-F238E27FC236}">
-                <a16:creationId xmlns:a16="http://schemas.microsoft.com/office/drawing/2014/main" id="{FF6C8228-D4F3-2DFF-3726-A33B7DD9C3D8}"/>
+                <a16:creationId xmlns:a16="http://schemas.microsoft.com/office/drawing/2014/main" id="{AB246880-35AE-582A-DEA3-A57D4C91F788}"/>
               </a:ext>
             </a:extLst>
           </p:cNvPr>
@@ -4928,7 +4984,7 @@
     </p:spTree>
     <p:extLst>
       <p:ext uri="{BB962C8B-B14F-4D97-AF65-F5344CB8AC3E}">
-        <p14:creationId xmlns:p14="http://schemas.microsoft.com/office/powerpoint/2010/main" val="2257060212"/>
+        <p14:creationId xmlns:p14="http://schemas.microsoft.com/office/powerpoint/2010/main" val="2579268069"/>
       </p:ext>
     </p:extLst>
   </p:cSld>
@@ -5052,7 +5108,7 @@
           <p:cNvPr id="2" name="テキスト ボックス 1">
             <a:extLst>
               <a:ext uri="{FF2B5EF4-FFF2-40B4-BE49-F238E27FC236}">
-                <a16:creationId xmlns:a16="http://schemas.microsoft.com/office/drawing/2014/main" id="{9E9F5016-72E9-4E24-380C-A433B257953C}"/>
+                <a16:creationId xmlns:a16="http://schemas.microsoft.com/office/drawing/2014/main" id="{96B5D752-5E41-6463-19B7-AD3D59A80F08}"/>
               </a:ext>
             </a:extLst>
           </p:cNvPr>
@@ -5098,7 +5154,7 @@
           <p:cNvPr id="3" name="テキスト ボックス 2">
             <a:extLst>
               <a:ext uri="{FF2B5EF4-FFF2-40B4-BE49-F238E27FC236}">
-                <a16:creationId xmlns:a16="http://schemas.microsoft.com/office/drawing/2014/main" id="{501D34F8-2C23-5639-1464-AFB49C37EF3B}"/>
+                <a16:creationId xmlns:a16="http://schemas.microsoft.com/office/drawing/2014/main" id="{288B33F5-C536-B46E-1EA4-1CB6502628AD}"/>
               </a:ext>
             </a:extLst>
           </p:cNvPr>
@@ -5122,20 +5178,14 @@
           <a:lstStyle/>
           <a:p>
             <a:r>
-              <a:rPr kumimoji="1" lang="en-US" altLang="ja-JP" sz="3400" b="1">
+              <a:rPr kumimoji="1" lang="ja-JP" altLang="en-US" sz="3400" b="1">
                 <a:solidFill>
                   <a:srgbClr val="111111"/>
                 </a:solidFill>
                 <a:latin typeface="Arial" panose="020B0604020202020204" pitchFamily="34" charset="0"/>
               </a:rPr>
-              <a:t>ITERATIVE IMPROVEMENT</a:t>
-            </a:r>
-            <a:endParaRPr kumimoji="1" lang="ja-JP" altLang="en-US" sz="3400" b="1">
-              <a:solidFill>
-                <a:srgbClr val="111111"/>
-              </a:solidFill>
-              <a:latin typeface="Arial" panose="020B0604020202020204" pitchFamily="34" charset="0"/>
-            </a:endParaRPr>
+              <a:t>コミットから分かる改善</a:t>
+            </a:r>
           </a:p>
         </p:txBody>
       </p:sp>
@@ -5144,7 +5194,7 @@
           <p:cNvPr id="4" name="テキスト ボックス 3">
             <a:extLst>
               <a:ext uri="{FF2B5EF4-FFF2-40B4-BE49-F238E27FC236}">
-                <a16:creationId xmlns:a16="http://schemas.microsoft.com/office/drawing/2014/main" id="{80C3B355-3E9B-66A5-50FE-46BF14C0788C}"/>
+                <a16:creationId xmlns:a16="http://schemas.microsoft.com/office/drawing/2014/main" id="{9E4B5BF6-EAD0-63BE-C05E-92D3FAE03C1B}"/>
               </a:ext>
             </a:extLst>
           </p:cNvPr>
@@ -5174,7 +5224,7 @@
                 </a:solidFill>
                 <a:latin typeface="Arial" panose="020B0604020202020204" pitchFamily="34" charset="0"/>
               </a:rPr>
-              <a:t>Small commits continuously improve features, quality and release readiness.</a:t>
+              <a:t>Rebrand web platform as SPOTPALETTE</a:t>
             </a:r>
             <a:endParaRPr kumimoji="1" lang="ja-JP" altLang="en-US" sz="2000">
               <a:solidFill>
@@ -5190,7 +5240,7 @@
           <p:cNvPr id="5" name="テキスト ボックス 4">
             <a:extLst>
               <a:ext uri="{FF2B5EF4-FFF2-40B4-BE49-F238E27FC236}">
-                <a16:creationId xmlns:a16="http://schemas.microsoft.com/office/drawing/2014/main" id="{786F4B9A-F801-2EE3-916D-9B841F97D447}"/>
+                <a16:creationId xmlns:a16="http://schemas.microsoft.com/office/drawing/2014/main" id="{484B3AEB-9745-1F23-C1F2-DE0CE0926189}"/>
               </a:ext>
             </a:extLst>
           </p:cNvPr>
@@ -5237,7 +5287,7 @@
             <a:hlinkClick r:id="" action="ppaction://media"/>
             <a:extLst>
               <a:ext uri="{FF2B5EF4-FFF2-40B4-BE49-F238E27FC236}">
-                <a16:creationId xmlns:a16="http://schemas.microsoft.com/office/drawing/2014/main" id="{65004D29-0FE9-C1CE-589A-2D8F2D37176D}"/>
+                <a16:creationId xmlns:a16="http://schemas.microsoft.com/office/drawing/2014/main" id="{D892CD9C-82E5-EFCC-1118-67F2C2FA59C0}"/>
               </a:ext>
             </a:extLst>
           </p:cNvPr>
@@ -5272,7 +5322,7 @@
     </p:spTree>
     <p:extLst>
       <p:ext uri="{BB962C8B-B14F-4D97-AF65-F5344CB8AC3E}">
-        <p14:creationId xmlns:p14="http://schemas.microsoft.com/office/powerpoint/2010/main" val="3622581233"/>
+        <p14:creationId xmlns:p14="http://schemas.microsoft.com/office/powerpoint/2010/main" val="2494438451"/>
       </p:ext>
     </p:extLst>
   </p:cSld>
@@ -5396,7 +5446,7 @@
           <p:cNvPr id="2" name="テキスト ボックス 1">
             <a:extLst>
               <a:ext uri="{FF2B5EF4-FFF2-40B4-BE49-F238E27FC236}">
-                <a16:creationId xmlns:a16="http://schemas.microsoft.com/office/drawing/2014/main" id="{CB6A9776-E4DE-AF4C-9850-CC8F448D8338}"/>
+                <a16:creationId xmlns:a16="http://schemas.microsoft.com/office/drawing/2014/main" id="{9D747A65-0BFF-977E-9EC6-DFD630909431}"/>
               </a:ext>
             </a:extLst>
           </p:cNvPr>
@@ -5442,7 +5492,7 @@
           <p:cNvPr id="3" name="テキスト ボックス 2">
             <a:extLst>
               <a:ext uri="{FF2B5EF4-FFF2-40B4-BE49-F238E27FC236}">
-                <a16:creationId xmlns:a16="http://schemas.microsoft.com/office/drawing/2014/main" id="{64354D12-B926-8535-E4AA-1C0F5D137D0B}"/>
+                <a16:creationId xmlns:a16="http://schemas.microsoft.com/office/drawing/2014/main" id="{B8DC0B96-97EE-4890-40DC-83825F8D8546}"/>
               </a:ext>
             </a:extLst>
           </p:cNvPr>
@@ -5466,20 +5516,14 @@
           <a:lstStyle/>
           <a:p>
             <a:r>
-              <a:rPr kumimoji="1" lang="en-US" altLang="ja-JP" sz="3400" b="1">
+              <a:rPr kumimoji="1" lang="ja-JP" altLang="en-US" sz="3400" b="1">
                 <a:solidFill>
                   <a:srgbClr val="111111"/>
                 </a:solidFill>
                 <a:latin typeface="Arial" panose="020B0604020202020204" pitchFamily="34" charset="0"/>
               </a:rPr>
-              <a:t>READ THE FULL ARTICLE</a:t>
-            </a:r>
-            <a:endParaRPr kumimoji="1" lang="ja-JP" altLang="en-US" sz="3400" b="1">
-              <a:solidFill>
-                <a:srgbClr val="111111"/>
-              </a:solidFill>
-              <a:latin typeface="Arial" panose="020B0604020202020204" pitchFamily="34" charset="0"/>
-            </a:endParaRPr>
+              <a:t>詳しくは積み上げログへ</a:t>
+            </a:r>
           </a:p>
         </p:txBody>
       </p:sp>
@@ -5488,7 +5532,7 @@
           <p:cNvPr id="4" name="テキスト ボックス 3">
             <a:extLst>
               <a:ext uri="{FF2B5EF4-FFF2-40B4-BE49-F238E27FC236}">
-                <a16:creationId xmlns:a16="http://schemas.microsoft.com/office/drawing/2014/main" id="{5BDC9297-21B9-7DF3-1866-B85586A7296A}"/>
+                <a16:creationId xmlns:a16="http://schemas.microsoft.com/office/drawing/2014/main" id="{131BBD11-ED31-84F9-2B0B-438A88BD2B58}"/>
               </a:ext>
             </a:extLst>
           </p:cNvPr>
@@ -5512,14 +5556,32 @@
           <a:lstStyle/>
           <a:p>
             <a:r>
-              <a:rPr kumimoji="1" lang="sv-SE" altLang="ja-JP" sz="2000">
+              <a:rPr kumimoji="1" lang="zh-TW" altLang="en-US" sz="2000">
+                <a:solidFill>
+                  <a:srgbClr val="333333"/>
+                </a:solidFill>
+                <a:latin typeface="Arial" panose="020B0604020202020204" pitchFamily="34" charset="0"/>
+              </a:rPr>
+              <a:t>記事： </a:t>
+            </a:r>
+            <a:r>
+              <a:rPr kumimoji="1" lang="en-US" altLang="zh-TW" sz="2000">
                 <a:solidFill>
                   <a:srgbClr val="333333"/>
                 </a:solidFill>
                 <a:latin typeface="Arial" panose="020B0604020202020204" pitchFamily="34" charset="0"/>
               </a:rPr>
               <a:t>https://syunnjack.dev/articles/leaflet-web1
-TSUMIAGE LOG</a:t>
+</a:t>
+            </a:r>
+            <a:r>
+              <a:rPr kumimoji="1" lang="zh-TW" altLang="en-US" sz="2000">
+                <a:solidFill>
+                  <a:srgbClr val="333333"/>
+                </a:solidFill>
+                <a:latin typeface="Arial" panose="020B0604020202020204" pitchFamily="34" charset="0"/>
+              </a:rPr>
+              <a:t>学び、作り、振り返る開発記録。</a:t>
             </a:r>
             <a:endParaRPr kumimoji="1" lang="ja-JP" altLang="en-US" sz="2000">
               <a:solidFill>
@@ -5535,7 +5597,7 @@
           <p:cNvPr id="5" name="テキスト ボックス 4">
             <a:extLst>
               <a:ext uri="{FF2B5EF4-FFF2-40B4-BE49-F238E27FC236}">
-                <a16:creationId xmlns:a16="http://schemas.microsoft.com/office/drawing/2014/main" id="{12D5AB6D-0C2F-5C5E-B530-ED2EDDF488AD}"/>
+                <a16:creationId xmlns:a16="http://schemas.microsoft.com/office/drawing/2014/main" id="{C08D8001-F3ED-A10A-4F25-6CBACF8C8C7A}"/>
               </a:ext>
             </a:extLst>
           </p:cNvPr>
@@ -5582,7 +5644,7 @@
             <a:hlinkClick r:id="" action="ppaction://media"/>
             <a:extLst>
               <a:ext uri="{FF2B5EF4-FFF2-40B4-BE49-F238E27FC236}">
-                <a16:creationId xmlns:a16="http://schemas.microsoft.com/office/drawing/2014/main" id="{3933CD66-3A6F-9F40-D533-03983ED5660E}"/>
+                <a16:creationId xmlns:a16="http://schemas.microsoft.com/office/drawing/2014/main" id="{D5F4B6A8-C362-CFC8-AD1F-631D4C5DD077}"/>
               </a:ext>
             </a:extLst>
           </p:cNvPr>
@@ -5617,7 +5679,7 @@
     </p:spTree>
     <p:extLst>
       <p:ext uri="{BB962C8B-B14F-4D97-AF65-F5344CB8AC3E}">
-        <p14:creationId xmlns:p14="http://schemas.microsoft.com/office/powerpoint/2010/main" val="2488342504"/>
+        <p14:creationId xmlns:p14="http://schemas.microsoft.com/office/powerpoint/2010/main" val="3744174715"/>
       </p:ext>
     </p:extLst>
   </p:cSld>

--- a/public/videos/repositories/leaflet-web1/leaflet-web1-tech-preview.pptx
+++ b/public/videos/repositories/leaflet-web1/leaflet-web1-tech-preview.pptx
@@ -134,7 +134,7 @@
           <p:cNvPr id="2" name="タイトル 1">
             <a:extLst>
               <a:ext uri="{FF2B5EF4-FFF2-40B4-BE49-F238E27FC236}">
-                <a16:creationId xmlns:a16="http://schemas.microsoft.com/office/drawing/2014/main" id="{60554CB7-2C2D-E9E0-33DC-D038A397D43E}"/>
+                <a16:creationId xmlns:a16="http://schemas.microsoft.com/office/drawing/2014/main" id="{6321B175-B601-F2F5-5D42-5845A55A90F5}"/>
               </a:ext>
             </a:extLst>
           </p:cNvPr>
@@ -171,7 +171,7 @@
           <p:cNvPr id="3" name="字幕 2">
             <a:extLst>
               <a:ext uri="{FF2B5EF4-FFF2-40B4-BE49-F238E27FC236}">
-                <a16:creationId xmlns:a16="http://schemas.microsoft.com/office/drawing/2014/main" id="{A8E8D3BA-A873-026B-381B-386DC9BE4BCD}"/>
+                <a16:creationId xmlns:a16="http://schemas.microsoft.com/office/drawing/2014/main" id="{D3714594-5672-21E8-8D08-0D0803D8608C}"/>
               </a:ext>
             </a:extLst>
           </p:cNvPr>
@@ -241,7 +241,7 @@
           <p:cNvPr id="4" name="日付プレースホルダー 3">
             <a:extLst>
               <a:ext uri="{FF2B5EF4-FFF2-40B4-BE49-F238E27FC236}">
-                <a16:creationId xmlns:a16="http://schemas.microsoft.com/office/drawing/2014/main" id="{2D0A2ACF-902E-A16E-C7D6-B34B08141D1D}"/>
+                <a16:creationId xmlns:a16="http://schemas.microsoft.com/office/drawing/2014/main" id="{0BFB9B93-A1A5-5FB6-2922-F6BB643997F4}"/>
               </a:ext>
             </a:extLst>
           </p:cNvPr>
@@ -257,7 +257,7 @@
           <a:bodyPr/>
           <a:lstStyle/>
           <a:p>
-            <a:fld id="{F04E7869-5D3E-4D61-9500-F031EB31109A}" type="datetimeFigureOut">
+            <a:fld id="{BD3B941C-3726-4D79-9544-F03D628DDEFE}" type="datetimeFigureOut">
               <a:rPr kumimoji="1" lang="ja-JP" altLang="en-US" smtClean="0"/>
               <a:t>2026/7/30</a:t>
             </a:fld>
@@ -270,7 +270,7 @@
           <p:cNvPr id="5" name="フッター プレースホルダー 4">
             <a:extLst>
               <a:ext uri="{FF2B5EF4-FFF2-40B4-BE49-F238E27FC236}">
-                <a16:creationId xmlns:a16="http://schemas.microsoft.com/office/drawing/2014/main" id="{68C99502-F1C7-7DA3-1036-EFD2C1B67A9E}"/>
+                <a16:creationId xmlns:a16="http://schemas.microsoft.com/office/drawing/2014/main" id="{CF6D6384-F659-63F4-9692-5407C9421F75}"/>
               </a:ext>
             </a:extLst>
           </p:cNvPr>
@@ -295,7 +295,7 @@
           <p:cNvPr id="6" name="スライド番号プレースホルダー 5">
             <a:extLst>
               <a:ext uri="{FF2B5EF4-FFF2-40B4-BE49-F238E27FC236}">
-                <a16:creationId xmlns:a16="http://schemas.microsoft.com/office/drawing/2014/main" id="{C6965E37-7C3B-DB1D-F326-D2DA810CC689}"/>
+                <a16:creationId xmlns:a16="http://schemas.microsoft.com/office/drawing/2014/main" id="{8247BB45-06C5-68A6-D057-423C70DCF4AD}"/>
               </a:ext>
             </a:extLst>
           </p:cNvPr>
@@ -311,7 +311,7 @@
           <a:bodyPr/>
           <a:lstStyle/>
           <a:p>
-            <a:fld id="{600A2B23-CD1C-44B4-B5A4-536257EE75C8}" type="slidenum">
+            <a:fld id="{00D1B6FB-B3E5-41B5-B956-FE3FF110E6A9}" type="slidenum">
               <a:rPr kumimoji="1" lang="ja-JP" altLang="en-US" smtClean="0"/>
               <a:t>‹#›</a:t>
             </a:fld>
@@ -322,7 +322,7 @@
     </p:spTree>
     <p:extLst>
       <p:ext uri="{BB962C8B-B14F-4D97-AF65-F5344CB8AC3E}">
-        <p14:creationId xmlns:p14="http://schemas.microsoft.com/office/powerpoint/2010/main" val="3244648281"/>
+        <p14:creationId xmlns:p14="http://schemas.microsoft.com/office/powerpoint/2010/main" val="2938642734"/>
       </p:ext>
     </p:extLst>
   </p:cSld>
@@ -354,7 +354,7 @@
           <p:cNvPr id="2" name="タイトル 1">
             <a:extLst>
               <a:ext uri="{FF2B5EF4-FFF2-40B4-BE49-F238E27FC236}">
-                <a16:creationId xmlns:a16="http://schemas.microsoft.com/office/drawing/2014/main" id="{52A5E133-D8CD-DA23-5919-FC5114F87649}"/>
+                <a16:creationId xmlns:a16="http://schemas.microsoft.com/office/drawing/2014/main" id="{80DFC2D5-9EFF-1258-A94B-276DDC052B3E}"/>
               </a:ext>
             </a:extLst>
           </p:cNvPr>
@@ -382,7 +382,7 @@
           <p:cNvPr id="3" name="縦書きテキスト プレースホルダー 2">
             <a:extLst>
               <a:ext uri="{FF2B5EF4-FFF2-40B4-BE49-F238E27FC236}">
-                <a16:creationId xmlns:a16="http://schemas.microsoft.com/office/drawing/2014/main" id="{10DC3908-E28E-B7D1-9BBA-603E6B705316}"/>
+                <a16:creationId xmlns:a16="http://schemas.microsoft.com/office/drawing/2014/main" id="{412A54BB-28E0-AAF0-05F0-7415132054AF}"/>
               </a:ext>
             </a:extLst>
           </p:cNvPr>
@@ -471,7 +471,7 @@
           <p:cNvPr id="4" name="日付プレースホルダー 3">
             <a:extLst>
               <a:ext uri="{FF2B5EF4-FFF2-40B4-BE49-F238E27FC236}">
-                <a16:creationId xmlns:a16="http://schemas.microsoft.com/office/drawing/2014/main" id="{6F513D9E-646D-0CEC-EB7F-E6FEFC350D0E}"/>
+                <a16:creationId xmlns:a16="http://schemas.microsoft.com/office/drawing/2014/main" id="{772BF822-4D45-B83F-FA1F-41B82E72476D}"/>
               </a:ext>
             </a:extLst>
           </p:cNvPr>
@@ -487,7 +487,7 @@
           <a:bodyPr/>
           <a:lstStyle/>
           <a:p>
-            <a:fld id="{F04E7869-5D3E-4D61-9500-F031EB31109A}" type="datetimeFigureOut">
+            <a:fld id="{BD3B941C-3726-4D79-9544-F03D628DDEFE}" type="datetimeFigureOut">
               <a:rPr kumimoji="1" lang="ja-JP" altLang="en-US" smtClean="0"/>
               <a:t>2026/7/30</a:t>
             </a:fld>
@@ -500,7 +500,7 @@
           <p:cNvPr id="5" name="フッター プレースホルダー 4">
             <a:extLst>
               <a:ext uri="{FF2B5EF4-FFF2-40B4-BE49-F238E27FC236}">
-                <a16:creationId xmlns:a16="http://schemas.microsoft.com/office/drawing/2014/main" id="{C1F76CAD-4CC3-9420-172C-3087EAFD4C2F}"/>
+                <a16:creationId xmlns:a16="http://schemas.microsoft.com/office/drawing/2014/main" id="{D74A3429-C3EC-EBF0-6C2F-32BDF8A02E49}"/>
               </a:ext>
             </a:extLst>
           </p:cNvPr>
@@ -525,7 +525,7 @@
           <p:cNvPr id="6" name="スライド番号プレースホルダー 5">
             <a:extLst>
               <a:ext uri="{FF2B5EF4-FFF2-40B4-BE49-F238E27FC236}">
-                <a16:creationId xmlns:a16="http://schemas.microsoft.com/office/drawing/2014/main" id="{8DADE4F0-29C3-88A5-22CE-B08191FB8E8F}"/>
+                <a16:creationId xmlns:a16="http://schemas.microsoft.com/office/drawing/2014/main" id="{6D26116D-6E6C-D3E4-D952-398533F536C9}"/>
               </a:ext>
             </a:extLst>
           </p:cNvPr>
@@ -541,7 +541,7 @@
           <a:bodyPr/>
           <a:lstStyle/>
           <a:p>
-            <a:fld id="{600A2B23-CD1C-44B4-B5A4-536257EE75C8}" type="slidenum">
+            <a:fld id="{00D1B6FB-B3E5-41B5-B956-FE3FF110E6A9}" type="slidenum">
               <a:rPr kumimoji="1" lang="ja-JP" altLang="en-US" smtClean="0"/>
               <a:t>‹#›</a:t>
             </a:fld>
@@ -552,7 +552,7 @@
     </p:spTree>
     <p:extLst>
       <p:ext uri="{BB962C8B-B14F-4D97-AF65-F5344CB8AC3E}">
-        <p14:creationId xmlns:p14="http://schemas.microsoft.com/office/powerpoint/2010/main" val="3092699477"/>
+        <p14:creationId xmlns:p14="http://schemas.microsoft.com/office/powerpoint/2010/main" val="677662970"/>
       </p:ext>
     </p:extLst>
   </p:cSld>
@@ -584,7 +584,7 @@
           <p:cNvPr id="2" name="縦書きタイトル 1">
             <a:extLst>
               <a:ext uri="{FF2B5EF4-FFF2-40B4-BE49-F238E27FC236}">
-                <a16:creationId xmlns:a16="http://schemas.microsoft.com/office/drawing/2014/main" id="{5B793FAF-5E72-E38A-8A0E-38E0DBB43EB8}"/>
+                <a16:creationId xmlns:a16="http://schemas.microsoft.com/office/drawing/2014/main" id="{039FBC9C-5DA1-758D-F2F8-F2E54C904B07}"/>
               </a:ext>
             </a:extLst>
           </p:cNvPr>
@@ -617,7 +617,7 @@
           <p:cNvPr id="3" name="縦書きテキスト プレースホルダー 2">
             <a:extLst>
               <a:ext uri="{FF2B5EF4-FFF2-40B4-BE49-F238E27FC236}">
-                <a16:creationId xmlns:a16="http://schemas.microsoft.com/office/drawing/2014/main" id="{829938D8-DCA7-955E-8C7D-3A6BB7EF924D}"/>
+                <a16:creationId xmlns:a16="http://schemas.microsoft.com/office/drawing/2014/main" id="{459A1B5A-3E5C-8E2E-4714-8F7029433AD9}"/>
               </a:ext>
             </a:extLst>
           </p:cNvPr>
@@ -711,7 +711,7 @@
           <p:cNvPr id="4" name="日付プレースホルダー 3">
             <a:extLst>
               <a:ext uri="{FF2B5EF4-FFF2-40B4-BE49-F238E27FC236}">
-                <a16:creationId xmlns:a16="http://schemas.microsoft.com/office/drawing/2014/main" id="{05007D36-1610-75ED-8211-7B1DDF9E6F4D}"/>
+                <a16:creationId xmlns:a16="http://schemas.microsoft.com/office/drawing/2014/main" id="{C0EB0A0A-4C23-B172-3893-6029C1A8479B}"/>
               </a:ext>
             </a:extLst>
           </p:cNvPr>
@@ -727,7 +727,7 @@
           <a:bodyPr/>
           <a:lstStyle/>
           <a:p>
-            <a:fld id="{F04E7869-5D3E-4D61-9500-F031EB31109A}" type="datetimeFigureOut">
+            <a:fld id="{BD3B941C-3726-4D79-9544-F03D628DDEFE}" type="datetimeFigureOut">
               <a:rPr kumimoji="1" lang="ja-JP" altLang="en-US" smtClean="0"/>
               <a:t>2026/7/30</a:t>
             </a:fld>
@@ -740,7 +740,7 @@
           <p:cNvPr id="5" name="フッター プレースホルダー 4">
             <a:extLst>
               <a:ext uri="{FF2B5EF4-FFF2-40B4-BE49-F238E27FC236}">
-                <a16:creationId xmlns:a16="http://schemas.microsoft.com/office/drawing/2014/main" id="{18D9B508-EC92-FE1F-80B0-6E10577D84D3}"/>
+                <a16:creationId xmlns:a16="http://schemas.microsoft.com/office/drawing/2014/main" id="{9D2CB6E5-9A76-1696-F907-91D70575CF59}"/>
               </a:ext>
             </a:extLst>
           </p:cNvPr>
@@ -765,7 +765,7 @@
           <p:cNvPr id="6" name="スライド番号プレースホルダー 5">
             <a:extLst>
               <a:ext uri="{FF2B5EF4-FFF2-40B4-BE49-F238E27FC236}">
-                <a16:creationId xmlns:a16="http://schemas.microsoft.com/office/drawing/2014/main" id="{65DB34C4-09DB-12F9-67EC-64F39C215ECF}"/>
+                <a16:creationId xmlns:a16="http://schemas.microsoft.com/office/drawing/2014/main" id="{5FFF8376-B896-BC5E-B649-B46B0F3FE01C}"/>
               </a:ext>
             </a:extLst>
           </p:cNvPr>
@@ -781,7 +781,7 @@
           <a:bodyPr/>
           <a:lstStyle/>
           <a:p>
-            <a:fld id="{600A2B23-CD1C-44B4-B5A4-536257EE75C8}" type="slidenum">
+            <a:fld id="{00D1B6FB-B3E5-41B5-B956-FE3FF110E6A9}" type="slidenum">
               <a:rPr kumimoji="1" lang="ja-JP" altLang="en-US" smtClean="0"/>
               <a:t>‹#›</a:t>
             </a:fld>
@@ -792,7 +792,7 @@
     </p:spTree>
     <p:extLst>
       <p:ext uri="{BB962C8B-B14F-4D97-AF65-F5344CB8AC3E}">
-        <p14:creationId xmlns:p14="http://schemas.microsoft.com/office/powerpoint/2010/main" val="3193406796"/>
+        <p14:creationId xmlns:p14="http://schemas.microsoft.com/office/powerpoint/2010/main" val="306427328"/>
       </p:ext>
     </p:extLst>
   </p:cSld>
@@ -824,7 +824,7 @@
           <p:cNvPr id="2" name="タイトル 1">
             <a:extLst>
               <a:ext uri="{FF2B5EF4-FFF2-40B4-BE49-F238E27FC236}">
-                <a16:creationId xmlns:a16="http://schemas.microsoft.com/office/drawing/2014/main" id="{3021821E-4082-0077-D9AC-C967C789D201}"/>
+                <a16:creationId xmlns:a16="http://schemas.microsoft.com/office/drawing/2014/main" id="{E9CBAB9E-06CA-836D-A86F-D78521ABB490}"/>
               </a:ext>
             </a:extLst>
           </p:cNvPr>
@@ -852,7 +852,7 @@
           <p:cNvPr id="3" name="コンテンツ プレースホルダー 2">
             <a:extLst>
               <a:ext uri="{FF2B5EF4-FFF2-40B4-BE49-F238E27FC236}">
-                <a16:creationId xmlns:a16="http://schemas.microsoft.com/office/drawing/2014/main" id="{E8828B73-D089-06EB-687F-29DBDDBE4973}"/>
+                <a16:creationId xmlns:a16="http://schemas.microsoft.com/office/drawing/2014/main" id="{BB8BC587-C5D6-7FF6-EFA4-5D5233205C08}"/>
               </a:ext>
             </a:extLst>
           </p:cNvPr>
@@ -941,7 +941,7 @@
           <p:cNvPr id="4" name="日付プレースホルダー 3">
             <a:extLst>
               <a:ext uri="{FF2B5EF4-FFF2-40B4-BE49-F238E27FC236}">
-                <a16:creationId xmlns:a16="http://schemas.microsoft.com/office/drawing/2014/main" id="{CF94336D-0E17-06DA-C5B1-D52136C960A2}"/>
+                <a16:creationId xmlns:a16="http://schemas.microsoft.com/office/drawing/2014/main" id="{560D51FD-5FEE-9D65-50F8-81078C30AFC5}"/>
               </a:ext>
             </a:extLst>
           </p:cNvPr>
@@ -957,7 +957,7 @@
           <a:bodyPr/>
           <a:lstStyle/>
           <a:p>
-            <a:fld id="{F04E7869-5D3E-4D61-9500-F031EB31109A}" type="datetimeFigureOut">
+            <a:fld id="{BD3B941C-3726-4D79-9544-F03D628DDEFE}" type="datetimeFigureOut">
               <a:rPr kumimoji="1" lang="ja-JP" altLang="en-US" smtClean="0"/>
               <a:t>2026/7/30</a:t>
             </a:fld>
@@ -970,7 +970,7 @@
           <p:cNvPr id="5" name="フッター プレースホルダー 4">
             <a:extLst>
               <a:ext uri="{FF2B5EF4-FFF2-40B4-BE49-F238E27FC236}">
-                <a16:creationId xmlns:a16="http://schemas.microsoft.com/office/drawing/2014/main" id="{3D34657D-C1A9-9F35-0228-4E72C6D514F2}"/>
+                <a16:creationId xmlns:a16="http://schemas.microsoft.com/office/drawing/2014/main" id="{661DECC3-D5E7-194C-6259-987D5A125248}"/>
               </a:ext>
             </a:extLst>
           </p:cNvPr>
@@ -995,7 +995,7 @@
           <p:cNvPr id="6" name="スライド番号プレースホルダー 5">
             <a:extLst>
               <a:ext uri="{FF2B5EF4-FFF2-40B4-BE49-F238E27FC236}">
-                <a16:creationId xmlns:a16="http://schemas.microsoft.com/office/drawing/2014/main" id="{3AEDFE76-8C6E-05D8-F33E-355BCE714FAA}"/>
+                <a16:creationId xmlns:a16="http://schemas.microsoft.com/office/drawing/2014/main" id="{0A7BF403-C576-D08E-5A85-FE68F154623B}"/>
               </a:ext>
             </a:extLst>
           </p:cNvPr>
@@ -1011,7 +1011,7 @@
           <a:bodyPr/>
           <a:lstStyle/>
           <a:p>
-            <a:fld id="{600A2B23-CD1C-44B4-B5A4-536257EE75C8}" type="slidenum">
+            <a:fld id="{00D1B6FB-B3E5-41B5-B956-FE3FF110E6A9}" type="slidenum">
               <a:rPr kumimoji="1" lang="ja-JP" altLang="en-US" smtClean="0"/>
               <a:t>‹#›</a:t>
             </a:fld>
@@ -1022,7 +1022,7 @@
     </p:spTree>
     <p:extLst>
       <p:ext uri="{BB962C8B-B14F-4D97-AF65-F5344CB8AC3E}">
-        <p14:creationId xmlns:p14="http://schemas.microsoft.com/office/powerpoint/2010/main" val="2347152338"/>
+        <p14:creationId xmlns:p14="http://schemas.microsoft.com/office/powerpoint/2010/main" val="3181022672"/>
       </p:ext>
     </p:extLst>
   </p:cSld>
@@ -1054,7 +1054,7 @@
           <p:cNvPr id="2" name="タイトル 1">
             <a:extLst>
               <a:ext uri="{FF2B5EF4-FFF2-40B4-BE49-F238E27FC236}">
-                <a16:creationId xmlns:a16="http://schemas.microsoft.com/office/drawing/2014/main" id="{5EB062C6-F2EC-2A0C-561E-9B0C15A3D4BC}"/>
+                <a16:creationId xmlns:a16="http://schemas.microsoft.com/office/drawing/2014/main" id="{EDE22658-A343-D55C-2065-F95C53CE4BE1}"/>
               </a:ext>
             </a:extLst>
           </p:cNvPr>
@@ -1091,7 +1091,7 @@
           <p:cNvPr id="3" name="テキスト プレースホルダー 2">
             <a:extLst>
               <a:ext uri="{FF2B5EF4-FFF2-40B4-BE49-F238E27FC236}">
-                <a16:creationId xmlns:a16="http://schemas.microsoft.com/office/drawing/2014/main" id="{30398E19-C837-A1CA-D7C9-10DD28A7DC0B}"/>
+                <a16:creationId xmlns:a16="http://schemas.microsoft.com/office/drawing/2014/main" id="{43B33946-7A56-9BF0-7B8B-5EA0C56F5099}"/>
               </a:ext>
             </a:extLst>
           </p:cNvPr>
@@ -1216,7 +1216,7 @@
           <p:cNvPr id="4" name="日付プレースホルダー 3">
             <a:extLst>
               <a:ext uri="{FF2B5EF4-FFF2-40B4-BE49-F238E27FC236}">
-                <a16:creationId xmlns:a16="http://schemas.microsoft.com/office/drawing/2014/main" id="{C45EF853-E183-CEE4-6467-B5F00AD4FD49}"/>
+                <a16:creationId xmlns:a16="http://schemas.microsoft.com/office/drawing/2014/main" id="{B05A8064-0A31-E774-A70B-22A238A4C491}"/>
               </a:ext>
             </a:extLst>
           </p:cNvPr>
@@ -1232,7 +1232,7 @@
           <a:bodyPr/>
           <a:lstStyle/>
           <a:p>
-            <a:fld id="{F04E7869-5D3E-4D61-9500-F031EB31109A}" type="datetimeFigureOut">
+            <a:fld id="{BD3B941C-3726-4D79-9544-F03D628DDEFE}" type="datetimeFigureOut">
               <a:rPr kumimoji="1" lang="ja-JP" altLang="en-US" smtClean="0"/>
               <a:t>2026/7/30</a:t>
             </a:fld>
@@ -1245,7 +1245,7 @@
           <p:cNvPr id="5" name="フッター プレースホルダー 4">
             <a:extLst>
               <a:ext uri="{FF2B5EF4-FFF2-40B4-BE49-F238E27FC236}">
-                <a16:creationId xmlns:a16="http://schemas.microsoft.com/office/drawing/2014/main" id="{6D1EF840-F165-22F9-4B29-7C2D41DD9720}"/>
+                <a16:creationId xmlns:a16="http://schemas.microsoft.com/office/drawing/2014/main" id="{9E719863-4AB6-B5A6-ED0B-F4BED8159B69}"/>
               </a:ext>
             </a:extLst>
           </p:cNvPr>
@@ -1270,7 +1270,7 @@
           <p:cNvPr id="6" name="スライド番号プレースホルダー 5">
             <a:extLst>
               <a:ext uri="{FF2B5EF4-FFF2-40B4-BE49-F238E27FC236}">
-                <a16:creationId xmlns:a16="http://schemas.microsoft.com/office/drawing/2014/main" id="{598493AD-E13C-2640-2C77-1AEB1AA99B88}"/>
+                <a16:creationId xmlns:a16="http://schemas.microsoft.com/office/drawing/2014/main" id="{555CDC61-0AE7-B37C-DD3F-AE7A0112D08A}"/>
               </a:ext>
             </a:extLst>
           </p:cNvPr>
@@ -1286,7 +1286,7 @@
           <a:bodyPr/>
           <a:lstStyle/>
           <a:p>
-            <a:fld id="{600A2B23-CD1C-44B4-B5A4-536257EE75C8}" type="slidenum">
+            <a:fld id="{00D1B6FB-B3E5-41B5-B956-FE3FF110E6A9}" type="slidenum">
               <a:rPr kumimoji="1" lang="ja-JP" altLang="en-US" smtClean="0"/>
               <a:t>‹#›</a:t>
             </a:fld>
@@ -1297,7 +1297,7 @@
     </p:spTree>
     <p:extLst>
       <p:ext uri="{BB962C8B-B14F-4D97-AF65-F5344CB8AC3E}">
-        <p14:creationId xmlns:p14="http://schemas.microsoft.com/office/powerpoint/2010/main" val="1267047436"/>
+        <p14:creationId xmlns:p14="http://schemas.microsoft.com/office/powerpoint/2010/main" val="3678854724"/>
       </p:ext>
     </p:extLst>
   </p:cSld>
@@ -1329,7 +1329,7 @@
           <p:cNvPr id="2" name="タイトル 1">
             <a:extLst>
               <a:ext uri="{FF2B5EF4-FFF2-40B4-BE49-F238E27FC236}">
-                <a16:creationId xmlns:a16="http://schemas.microsoft.com/office/drawing/2014/main" id="{1A2D35CF-C1E0-678F-7004-3D922B06EF46}"/>
+                <a16:creationId xmlns:a16="http://schemas.microsoft.com/office/drawing/2014/main" id="{25DB097C-48A5-74B6-022D-D081780BD291}"/>
               </a:ext>
             </a:extLst>
           </p:cNvPr>
@@ -1357,7 +1357,7 @@
           <p:cNvPr id="3" name="コンテンツ プレースホルダー 2">
             <a:extLst>
               <a:ext uri="{FF2B5EF4-FFF2-40B4-BE49-F238E27FC236}">
-                <a16:creationId xmlns:a16="http://schemas.microsoft.com/office/drawing/2014/main" id="{D38D9CF7-1DFC-57A7-F355-D24403E141C4}"/>
+                <a16:creationId xmlns:a16="http://schemas.microsoft.com/office/drawing/2014/main" id="{97A2093B-3308-9789-AF39-BC63007B3653}"/>
               </a:ext>
             </a:extLst>
           </p:cNvPr>
@@ -1451,7 +1451,7 @@
           <p:cNvPr id="4" name="コンテンツ プレースホルダー 3">
             <a:extLst>
               <a:ext uri="{FF2B5EF4-FFF2-40B4-BE49-F238E27FC236}">
-                <a16:creationId xmlns:a16="http://schemas.microsoft.com/office/drawing/2014/main" id="{8E0B2797-75BA-385F-095B-F5AADC57A719}"/>
+                <a16:creationId xmlns:a16="http://schemas.microsoft.com/office/drawing/2014/main" id="{20EA6AE2-C8EF-E3B8-5295-2AF5BC9172D2}"/>
               </a:ext>
             </a:extLst>
           </p:cNvPr>
@@ -1545,7 +1545,7 @@
           <p:cNvPr id="5" name="日付プレースホルダー 4">
             <a:extLst>
               <a:ext uri="{FF2B5EF4-FFF2-40B4-BE49-F238E27FC236}">
-                <a16:creationId xmlns:a16="http://schemas.microsoft.com/office/drawing/2014/main" id="{9AF3B18C-0DB5-2180-90E5-5D89B471090B}"/>
+                <a16:creationId xmlns:a16="http://schemas.microsoft.com/office/drawing/2014/main" id="{991CA1EF-AFF5-18AF-65EB-3A011BA54445}"/>
               </a:ext>
             </a:extLst>
           </p:cNvPr>
@@ -1561,7 +1561,7 @@
           <a:bodyPr/>
           <a:lstStyle/>
           <a:p>
-            <a:fld id="{F04E7869-5D3E-4D61-9500-F031EB31109A}" type="datetimeFigureOut">
+            <a:fld id="{BD3B941C-3726-4D79-9544-F03D628DDEFE}" type="datetimeFigureOut">
               <a:rPr kumimoji="1" lang="ja-JP" altLang="en-US" smtClean="0"/>
               <a:t>2026/7/30</a:t>
             </a:fld>
@@ -1574,7 +1574,7 @@
           <p:cNvPr id="6" name="フッター プレースホルダー 5">
             <a:extLst>
               <a:ext uri="{FF2B5EF4-FFF2-40B4-BE49-F238E27FC236}">
-                <a16:creationId xmlns:a16="http://schemas.microsoft.com/office/drawing/2014/main" id="{032DFD76-5DCE-F2EB-62D8-329B13E24979}"/>
+                <a16:creationId xmlns:a16="http://schemas.microsoft.com/office/drawing/2014/main" id="{FBA7DEF9-EBA0-7F50-B5EB-F3B9716C70F5}"/>
               </a:ext>
             </a:extLst>
           </p:cNvPr>
@@ -1599,7 +1599,7 @@
           <p:cNvPr id="7" name="スライド番号プレースホルダー 6">
             <a:extLst>
               <a:ext uri="{FF2B5EF4-FFF2-40B4-BE49-F238E27FC236}">
-                <a16:creationId xmlns:a16="http://schemas.microsoft.com/office/drawing/2014/main" id="{EED06728-2EA2-54E3-78E5-C2CE53E3AE35}"/>
+                <a16:creationId xmlns:a16="http://schemas.microsoft.com/office/drawing/2014/main" id="{2D13EA55-55A1-D6A1-02FF-BEE3A857E5E5}"/>
               </a:ext>
             </a:extLst>
           </p:cNvPr>
@@ -1615,7 +1615,7 @@
           <a:bodyPr/>
           <a:lstStyle/>
           <a:p>
-            <a:fld id="{600A2B23-CD1C-44B4-B5A4-536257EE75C8}" type="slidenum">
+            <a:fld id="{00D1B6FB-B3E5-41B5-B956-FE3FF110E6A9}" type="slidenum">
               <a:rPr kumimoji="1" lang="ja-JP" altLang="en-US" smtClean="0"/>
               <a:t>‹#›</a:t>
             </a:fld>
@@ -1626,7 +1626,7 @@
     </p:spTree>
     <p:extLst>
       <p:ext uri="{BB962C8B-B14F-4D97-AF65-F5344CB8AC3E}">
-        <p14:creationId xmlns:p14="http://schemas.microsoft.com/office/powerpoint/2010/main" val="1239861980"/>
+        <p14:creationId xmlns:p14="http://schemas.microsoft.com/office/powerpoint/2010/main" val="1670629177"/>
       </p:ext>
     </p:extLst>
   </p:cSld>
@@ -1658,7 +1658,7 @@
           <p:cNvPr id="2" name="タイトル 1">
             <a:extLst>
               <a:ext uri="{FF2B5EF4-FFF2-40B4-BE49-F238E27FC236}">
-                <a16:creationId xmlns:a16="http://schemas.microsoft.com/office/drawing/2014/main" id="{D2171884-C1EA-F0B4-54F7-D7E22551C1C7}"/>
+                <a16:creationId xmlns:a16="http://schemas.microsoft.com/office/drawing/2014/main" id="{5F855247-8B4C-BCA1-9BBD-34B029F47807}"/>
               </a:ext>
             </a:extLst>
           </p:cNvPr>
@@ -1691,7 +1691,7 @@
           <p:cNvPr id="3" name="テキスト プレースホルダー 2">
             <a:extLst>
               <a:ext uri="{FF2B5EF4-FFF2-40B4-BE49-F238E27FC236}">
-                <a16:creationId xmlns:a16="http://schemas.microsoft.com/office/drawing/2014/main" id="{E0CE5B08-9406-E004-9D7F-170BE83D26D0}"/>
+                <a16:creationId xmlns:a16="http://schemas.microsoft.com/office/drawing/2014/main" id="{B197950D-2C9D-DD59-EE4B-5D25ADE76DA0}"/>
               </a:ext>
             </a:extLst>
           </p:cNvPr>
@@ -1762,7 +1762,7 @@
           <p:cNvPr id="4" name="コンテンツ プレースホルダー 3">
             <a:extLst>
               <a:ext uri="{FF2B5EF4-FFF2-40B4-BE49-F238E27FC236}">
-                <a16:creationId xmlns:a16="http://schemas.microsoft.com/office/drawing/2014/main" id="{0BB736D0-139D-D13A-5950-8639A15B8CBB}"/>
+                <a16:creationId xmlns:a16="http://schemas.microsoft.com/office/drawing/2014/main" id="{968E412F-8962-65FE-7E5A-4DE1FC1022CA}"/>
               </a:ext>
             </a:extLst>
           </p:cNvPr>
@@ -1856,7 +1856,7 @@
           <p:cNvPr id="5" name="テキスト プレースホルダー 4">
             <a:extLst>
               <a:ext uri="{FF2B5EF4-FFF2-40B4-BE49-F238E27FC236}">
-                <a16:creationId xmlns:a16="http://schemas.microsoft.com/office/drawing/2014/main" id="{D8FE85AF-4144-9489-28FC-11F9C2F871DE}"/>
+                <a16:creationId xmlns:a16="http://schemas.microsoft.com/office/drawing/2014/main" id="{EC0BE96B-8C88-C3C1-7A2B-C951026E0397}"/>
               </a:ext>
             </a:extLst>
           </p:cNvPr>
@@ -1927,7 +1927,7 @@
           <p:cNvPr id="6" name="コンテンツ プレースホルダー 5">
             <a:extLst>
               <a:ext uri="{FF2B5EF4-FFF2-40B4-BE49-F238E27FC236}">
-                <a16:creationId xmlns:a16="http://schemas.microsoft.com/office/drawing/2014/main" id="{CDC376A0-77EA-6F6D-3B93-8B91E8B81EF3}"/>
+                <a16:creationId xmlns:a16="http://schemas.microsoft.com/office/drawing/2014/main" id="{5C98B079-AC86-AA68-A058-59483565FDCF}"/>
               </a:ext>
             </a:extLst>
           </p:cNvPr>
@@ -2021,7 +2021,7 @@
           <p:cNvPr id="7" name="日付プレースホルダー 6">
             <a:extLst>
               <a:ext uri="{FF2B5EF4-FFF2-40B4-BE49-F238E27FC236}">
-                <a16:creationId xmlns:a16="http://schemas.microsoft.com/office/drawing/2014/main" id="{B75E0FAA-E4A5-5FEB-0C70-03783AE34F8C}"/>
+                <a16:creationId xmlns:a16="http://schemas.microsoft.com/office/drawing/2014/main" id="{3B584302-959F-A7B5-5C1E-5D43A1B024FA}"/>
               </a:ext>
             </a:extLst>
           </p:cNvPr>
@@ -2037,7 +2037,7 @@
           <a:bodyPr/>
           <a:lstStyle/>
           <a:p>
-            <a:fld id="{F04E7869-5D3E-4D61-9500-F031EB31109A}" type="datetimeFigureOut">
+            <a:fld id="{BD3B941C-3726-4D79-9544-F03D628DDEFE}" type="datetimeFigureOut">
               <a:rPr kumimoji="1" lang="ja-JP" altLang="en-US" smtClean="0"/>
               <a:t>2026/7/30</a:t>
             </a:fld>
@@ -2050,7 +2050,7 @@
           <p:cNvPr id="8" name="フッター プレースホルダー 7">
             <a:extLst>
               <a:ext uri="{FF2B5EF4-FFF2-40B4-BE49-F238E27FC236}">
-                <a16:creationId xmlns:a16="http://schemas.microsoft.com/office/drawing/2014/main" id="{BC1641E1-1685-D4AA-59A8-E1ED912090F1}"/>
+                <a16:creationId xmlns:a16="http://schemas.microsoft.com/office/drawing/2014/main" id="{C3202F21-82FD-D5FD-2C74-88405AE08B9E}"/>
               </a:ext>
             </a:extLst>
           </p:cNvPr>
@@ -2075,7 +2075,7 @@
           <p:cNvPr id="9" name="スライド番号プレースホルダー 8">
             <a:extLst>
               <a:ext uri="{FF2B5EF4-FFF2-40B4-BE49-F238E27FC236}">
-                <a16:creationId xmlns:a16="http://schemas.microsoft.com/office/drawing/2014/main" id="{AE4D5C5A-A854-045A-6F79-42022F95AF7C}"/>
+                <a16:creationId xmlns:a16="http://schemas.microsoft.com/office/drawing/2014/main" id="{8CEBD23C-EEFB-563B-34D0-CCED47CA62DA}"/>
               </a:ext>
             </a:extLst>
           </p:cNvPr>
@@ -2091,7 +2091,7 @@
           <a:bodyPr/>
           <a:lstStyle/>
           <a:p>
-            <a:fld id="{600A2B23-CD1C-44B4-B5A4-536257EE75C8}" type="slidenum">
+            <a:fld id="{00D1B6FB-B3E5-41B5-B956-FE3FF110E6A9}" type="slidenum">
               <a:rPr kumimoji="1" lang="ja-JP" altLang="en-US" smtClean="0"/>
               <a:t>‹#›</a:t>
             </a:fld>
@@ -2102,7 +2102,7 @@
     </p:spTree>
     <p:extLst>
       <p:ext uri="{BB962C8B-B14F-4D97-AF65-F5344CB8AC3E}">
-        <p14:creationId xmlns:p14="http://schemas.microsoft.com/office/powerpoint/2010/main" val="825245194"/>
+        <p14:creationId xmlns:p14="http://schemas.microsoft.com/office/powerpoint/2010/main" val="2583544958"/>
       </p:ext>
     </p:extLst>
   </p:cSld>
@@ -2134,7 +2134,7 @@
           <p:cNvPr id="2" name="タイトル 1">
             <a:extLst>
               <a:ext uri="{FF2B5EF4-FFF2-40B4-BE49-F238E27FC236}">
-                <a16:creationId xmlns:a16="http://schemas.microsoft.com/office/drawing/2014/main" id="{28161FBC-0CC0-4A1F-2B0B-A8CC8AD7E2D9}"/>
+                <a16:creationId xmlns:a16="http://schemas.microsoft.com/office/drawing/2014/main" id="{7F344FC1-9CD4-3398-5F52-48EA2B1D28ED}"/>
               </a:ext>
             </a:extLst>
           </p:cNvPr>
@@ -2162,7 +2162,7 @@
           <p:cNvPr id="3" name="日付プレースホルダー 2">
             <a:extLst>
               <a:ext uri="{FF2B5EF4-FFF2-40B4-BE49-F238E27FC236}">
-                <a16:creationId xmlns:a16="http://schemas.microsoft.com/office/drawing/2014/main" id="{D5045000-D5C2-DAC4-725D-93A896586503}"/>
+                <a16:creationId xmlns:a16="http://schemas.microsoft.com/office/drawing/2014/main" id="{B1EC99C1-9049-1174-9E2B-84F6D88DD749}"/>
               </a:ext>
             </a:extLst>
           </p:cNvPr>
@@ -2178,7 +2178,7 @@
           <a:bodyPr/>
           <a:lstStyle/>
           <a:p>
-            <a:fld id="{F04E7869-5D3E-4D61-9500-F031EB31109A}" type="datetimeFigureOut">
+            <a:fld id="{BD3B941C-3726-4D79-9544-F03D628DDEFE}" type="datetimeFigureOut">
               <a:rPr kumimoji="1" lang="ja-JP" altLang="en-US" smtClean="0"/>
               <a:t>2026/7/30</a:t>
             </a:fld>
@@ -2191,7 +2191,7 @@
           <p:cNvPr id="4" name="フッター プレースホルダー 3">
             <a:extLst>
               <a:ext uri="{FF2B5EF4-FFF2-40B4-BE49-F238E27FC236}">
-                <a16:creationId xmlns:a16="http://schemas.microsoft.com/office/drawing/2014/main" id="{C906DBD8-3B5C-C7CE-334E-ABF472993785}"/>
+                <a16:creationId xmlns:a16="http://schemas.microsoft.com/office/drawing/2014/main" id="{C52C64FD-51D8-5907-FB42-E6337A26F69F}"/>
               </a:ext>
             </a:extLst>
           </p:cNvPr>
@@ -2216,7 +2216,7 @@
           <p:cNvPr id="5" name="スライド番号プレースホルダー 4">
             <a:extLst>
               <a:ext uri="{FF2B5EF4-FFF2-40B4-BE49-F238E27FC236}">
-                <a16:creationId xmlns:a16="http://schemas.microsoft.com/office/drawing/2014/main" id="{6057A7B3-DA1C-7913-4449-01442BCA4A6D}"/>
+                <a16:creationId xmlns:a16="http://schemas.microsoft.com/office/drawing/2014/main" id="{116755DA-719A-752A-8ACF-8A6D3885CF29}"/>
               </a:ext>
             </a:extLst>
           </p:cNvPr>
@@ -2232,7 +2232,7 @@
           <a:bodyPr/>
           <a:lstStyle/>
           <a:p>
-            <a:fld id="{600A2B23-CD1C-44B4-B5A4-536257EE75C8}" type="slidenum">
+            <a:fld id="{00D1B6FB-B3E5-41B5-B956-FE3FF110E6A9}" type="slidenum">
               <a:rPr kumimoji="1" lang="ja-JP" altLang="en-US" smtClean="0"/>
               <a:t>‹#›</a:t>
             </a:fld>
@@ -2243,7 +2243,7 @@
     </p:spTree>
     <p:extLst>
       <p:ext uri="{BB962C8B-B14F-4D97-AF65-F5344CB8AC3E}">
-        <p14:creationId xmlns:p14="http://schemas.microsoft.com/office/powerpoint/2010/main" val="216147110"/>
+        <p14:creationId xmlns:p14="http://schemas.microsoft.com/office/powerpoint/2010/main" val="2155824506"/>
       </p:ext>
     </p:extLst>
   </p:cSld>
@@ -2275,7 +2275,7 @@
           <p:cNvPr id="2" name="日付プレースホルダー 1">
             <a:extLst>
               <a:ext uri="{FF2B5EF4-FFF2-40B4-BE49-F238E27FC236}">
-                <a16:creationId xmlns:a16="http://schemas.microsoft.com/office/drawing/2014/main" id="{7BCA391A-A8F6-DB66-7FB1-2BC2E12B3864}"/>
+                <a16:creationId xmlns:a16="http://schemas.microsoft.com/office/drawing/2014/main" id="{C50F262B-9A38-176A-A58F-9E84D7AC250E}"/>
               </a:ext>
             </a:extLst>
           </p:cNvPr>
@@ -2291,7 +2291,7 @@
           <a:bodyPr/>
           <a:lstStyle/>
           <a:p>
-            <a:fld id="{F04E7869-5D3E-4D61-9500-F031EB31109A}" type="datetimeFigureOut">
+            <a:fld id="{BD3B941C-3726-4D79-9544-F03D628DDEFE}" type="datetimeFigureOut">
               <a:rPr kumimoji="1" lang="ja-JP" altLang="en-US" smtClean="0"/>
               <a:t>2026/7/30</a:t>
             </a:fld>
@@ -2304,7 +2304,7 @@
           <p:cNvPr id="3" name="フッター プレースホルダー 2">
             <a:extLst>
               <a:ext uri="{FF2B5EF4-FFF2-40B4-BE49-F238E27FC236}">
-                <a16:creationId xmlns:a16="http://schemas.microsoft.com/office/drawing/2014/main" id="{A5CFD911-A446-A993-5AB6-E9B072420A51}"/>
+                <a16:creationId xmlns:a16="http://schemas.microsoft.com/office/drawing/2014/main" id="{6E2CC999-4321-E184-C836-191BE110C5AC}"/>
               </a:ext>
             </a:extLst>
           </p:cNvPr>
@@ -2329,7 +2329,7 @@
           <p:cNvPr id="4" name="スライド番号プレースホルダー 3">
             <a:extLst>
               <a:ext uri="{FF2B5EF4-FFF2-40B4-BE49-F238E27FC236}">
-                <a16:creationId xmlns:a16="http://schemas.microsoft.com/office/drawing/2014/main" id="{E7824C4C-79AC-DDB5-6C50-80AF5C041AE4}"/>
+                <a16:creationId xmlns:a16="http://schemas.microsoft.com/office/drawing/2014/main" id="{2408731C-552D-8768-919D-F09DBA783008}"/>
               </a:ext>
             </a:extLst>
           </p:cNvPr>
@@ -2345,7 +2345,7 @@
           <a:bodyPr/>
           <a:lstStyle/>
           <a:p>
-            <a:fld id="{600A2B23-CD1C-44B4-B5A4-536257EE75C8}" type="slidenum">
+            <a:fld id="{00D1B6FB-B3E5-41B5-B956-FE3FF110E6A9}" type="slidenum">
               <a:rPr kumimoji="1" lang="ja-JP" altLang="en-US" smtClean="0"/>
               <a:t>‹#›</a:t>
             </a:fld>
@@ -2356,7 +2356,7 @@
     </p:spTree>
     <p:extLst>
       <p:ext uri="{BB962C8B-B14F-4D97-AF65-F5344CB8AC3E}">
-        <p14:creationId xmlns:p14="http://schemas.microsoft.com/office/powerpoint/2010/main" val="905956529"/>
+        <p14:creationId xmlns:p14="http://schemas.microsoft.com/office/powerpoint/2010/main" val="720508105"/>
       </p:ext>
     </p:extLst>
   </p:cSld>
@@ -2388,7 +2388,7 @@
           <p:cNvPr id="2" name="タイトル 1">
             <a:extLst>
               <a:ext uri="{FF2B5EF4-FFF2-40B4-BE49-F238E27FC236}">
-                <a16:creationId xmlns:a16="http://schemas.microsoft.com/office/drawing/2014/main" id="{4411B36F-15C3-3DAD-AEA0-F672A12BD31A}"/>
+                <a16:creationId xmlns:a16="http://schemas.microsoft.com/office/drawing/2014/main" id="{0CB4A7E0-046A-BC25-E337-93B5E923084D}"/>
               </a:ext>
             </a:extLst>
           </p:cNvPr>
@@ -2425,7 +2425,7 @@
           <p:cNvPr id="3" name="コンテンツ プレースホルダー 2">
             <a:extLst>
               <a:ext uri="{FF2B5EF4-FFF2-40B4-BE49-F238E27FC236}">
-                <a16:creationId xmlns:a16="http://schemas.microsoft.com/office/drawing/2014/main" id="{5602ADD1-B468-45CC-C2AF-0C4880F986BF}"/>
+                <a16:creationId xmlns:a16="http://schemas.microsoft.com/office/drawing/2014/main" id="{CDF99F71-952C-6B23-5BB5-F00F277300B9}"/>
               </a:ext>
             </a:extLst>
           </p:cNvPr>
@@ -2547,7 +2547,7 @@
           <p:cNvPr id="4" name="テキスト プレースホルダー 3">
             <a:extLst>
               <a:ext uri="{FF2B5EF4-FFF2-40B4-BE49-F238E27FC236}">
-                <a16:creationId xmlns:a16="http://schemas.microsoft.com/office/drawing/2014/main" id="{D1853B32-5DEC-C61C-D29F-491EEEFAAC6E}"/>
+                <a16:creationId xmlns:a16="http://schemas.microsoft.com/office/drawing/2014/main" id="{E96C1C1A-CC87-A735-E68A-7ED578E94F23}"/>
               </a:ext>
             </a:extLst>
           </p:cNvPr>
@@ -2618,7 +2618,7 @@
           <p:cNvPr id="5" name="日付プレースホルダー 4">
             <a:extLst>
               <a:ext uri="{FF2B5EF4-FFF2-40B4-BE49-F238E27FC236}">
-                <a16:creationId xmlns:a16="http://schemas.microsoft.com/office/drawing/2014/main" id="{DB3A2C0E-BB8D-A52D-76D3-1B40386FF13F}"/>
+                <a16:creationId xmlns:a16="http://schemas.microsoft.com/office/drawing/2014/main" id="{7AA10454-8B80-9F54-AAAE-1D9277C45C9B}"/>
               </a:ext>
             </a:extLst>
           </p:cNvPr>
@@ -2634,7 +2634,7 @@
           <a:bodyPr/>
           <a:lstStyle/>
           <a:p>
-            <a:fld id="{F04E7869-5D3E-4D61-9500-F031EB31109A}" type="datetimeFigureOut">
+            <a:fld id="{BD3B941C-3726-4D79-9544-F03D628DDEFE}" type="datetimeFigureOut">
               <a:rPr kumimoji="1" lang="ja-JP" altLang="en-US" smtClean="0"/>
               <a:t>2026/7/30</a:t>
             </a:fld>
@@ -2647,7 +2647,7 @@
           <p:cNvPr id="6" name="フッター プレースホルダー 5">
             <a:extLst>
               <a:ext uri="{FF2B5EF4-FFF2-40B4-BE49-F238E27FC236}">
-                <a16:creationId xmlns:a16="http://schemas.microsoft.com/office/drawing/2014/main" id="{D28EF219-FD90-6075-73F3-E954465E070E}"/>
+                <a16:creationId xmlns:a16="http://schemas.microsoft.com/office/drawing/2014/main" id="{54F95245-E340-0B1D-A804-4014F43F229E}"/>
               </a:ext>
             </a:extLst>
           </p:cNvPr>
@@ -2672,7 +2672,7 @@
           <p:cNvPr id="7" name="スライド番号プレースホルダー 6">
             <a:extLst>
               <a:ext uri="{FF2B5EF4-FFF2-40B4-BE49-F238E27FC236}">
-                <a16:creationId xmlns:a16="http://schemas.microsoft.com/office/drawing/2014/main" id="{F1413D4E-A344-9B01-9743-E8D5A90C4C0C}"/>
+                <a16:creationId xmlns:a16="http://schemas.microsoft.com/office/drawing/2014/main" id="{75FA2D62-3984-DE9E-1D34-8603D7289182}"/>
               </a:ext>
             </a:extLst>
           </p:cNvPr>
@@ -2688,7 +2688,7 @@
           <a:bodyPr/>
           <a:lstStyle/>
           <a:p>
-            <a:fld id="{600A2B23-CD1C-44B4-B5A4-536257EE75C8}" type="slidenum">
+            <a:fld id="{00D1B6FB-B3E5-41B5-B956-FE3FF110E6A9}" type="slidenum">
               <a:rPr kumimoji="1" lang="ja-JP" altLang="en-US" smtClean="0"/>
               <a:t>‹#›</a:t>
             </a:fld>
@@ -2699,7 +2699,7 @@
     </p:spTree>
     <p:extLst>
       <p:ext uri="{BB962C8B-B14F-4D97-AF65-F5344CB8AC3E}">
-        <p14:creationId xmlns:p14="http://schemas.microsoft.com/office/powerpoint/2010/main" val="3979329975"/>
+        <p14:creationId xmlns:p14="http://schemas.microsoft.com/office/powerpoint/2010/main" val="1313461286"/>
       </p:ext>
     </p:extLst>
   </p:cSld>
@@ -2731,7 +2731,7 @@
           <p:cNvPr id="2" name="タイトル 1">
             <a:extLst>
               <a:ext uri="{FF2B5EF4-FFF2-40B4-BE49-F238E27FC236}">
-                <a16:creationId xmlns:a16="http://schemas.microsoft.com/office/drawing/2014/main" id="{82FF04D0-0F0D-276A-5830-F1D73EF9AA9F}"/>
+                <a16:creationId xmlns:a16="http://schemas.microsoft.com/office/drawing/2014/main" id="{754A9D70-A3CD-72B7-A639-4D6ABAF79B88}"/>
               </a:ext>
             </a:extLst>
           </p:cNvPr>
@@ -2768,7 +2768,7 @@
           <p:cNvPr id="3" name="図プレースホルダー 2">
             <a:extLst>
               <a:ext uri="{FF2B5EF4-FFF2-40B4-BE49-F238E27FC236}">
-                <a16:creationId xmlns:a16="http://schemas.microsoft.com/office/drawing/2014/main" id="{A1067A98-58AD-64D3-7894-FA554FF5314D}"/>
+                <a16:creationId xmlns:a16="http://schemas.microsoft.com/office/drawing/2014/main" id="{A1F92B88-AA23-855F-94F6-45229A13B825}"/>
               </a:ext>
             </a:extLst>
           </p:cNvPr>
@@ -2835,7 +2835,7 @@
           <p:cNvPr id="4" name="テキスト プレースホルダー 3">
             <a:extLst>
               <a:ext uri="{FF2B5EF4-FFF2-40B4-BE49-F238E27FC236}">
-                <a16:creationId xmlns:a16="http://schemas.microsoft.com/office/drawing/2014/main" id="{82A315C6-DA89-976E-8C07-514FCD676591}"/>
+                <a16:creationId xmlns:a16="http://schemas.microsoft.com/office/drawing/2014/main" id="{E911C59C-A413-B166-DF71-ABCE35CC036A}"/>
               </a:ext>
             </a:extLst>
           </p:cNvPr>
@@ -2906,7 +2906,7 @@
           <p:cNvPr id="5" name="日付プレースホルダー 4">
             <a:extLst>
               <a:ext uri="{FF2B5EF4-FFF2-40B4-BE49-F238E27FC236}">
-                <a16:creationId xmlns:a16="http://schemas.microsoft.com/office/drawing/2014/main" id="{CD9D7BBD-CE4E-7367-0348-C93FB9322234}"/>
+                <a16:creationId xmlns:a16="http://schemas.microsoft.com/office/drawing/2014/main" id="{F1F21EE5-6A5D-D1B2-5D15-FABB7EAE4BEC}"/>
               </a:ext>
             </a:extLst>
           </p:cNvPr>
@@ -2922,7 +2922,7 @@
           <a:bodyPr/>
           <a:lstStyle/>
           <a:p>
-            <a:fld id="{F04E7869-5D3E-4D61-9500-F031EB31109A}" type="datetimeFigureOut">
+            <a:fld id="{BD3B941C-3726-4D79-9544-F03D628DDEFE}" type="datetimeFigureOut">
               <a:rPr kumimoji="1" lang="ja-JP" altLang="en-US" smtClean="0"/>
               <a:t>2026/7/30</a:t>
             </a:fld>
@@ -2935,7 +2935,7 @@
           <p:cNvPr id="6" name="フッター プレースホルダー 5">
             <a:extLst>
               <a:ext uri="{FF2B5EF4-FFF2-40B4-BE49-F238E27FC236}">
-                <a16:creationId xmlns:a16="http://schemas.microsoft.com/office/drawing/2014/main" id="{CC27D515-A9AB-0561-84DB-1084E5D6B63F}"/>
+                <a16:creationId xmlns:a16="http://schemas.microsoft.com/office/drawing/2014/main" id="{B7BB1064-5E5B-1814-8BA7-F20CBB992D14}"/>
               </a:ext>
             </a:extLst>
           </p:cNvPr>
@@ -2960,7 +2960,7 @@
           <p:cNvPr id="7" name="スライド番号プレースホルダー 6">
             <a:extLst>
               <a:ext uri="{FF2B5EF4-FFF2-40B4-BE49-F238E27FC236}">
-                <a16:creationId xmlns:a16="http://schemas.microsoft.com/office/drawing/2014/main" id="{37CAFFB9-9635-096F-DE66-ED469C1A0A68}"/>
+                <a16:creationId xmlns:a16="http://schemas.microsoft.com/office/drawing/2014/main" id="{AF0E2D25-7944-EA47-5F4D-FA1F78250BCD}"/>
               </a:ext>
             </a:extLst>
           </p:cNvPr>
@@ -2976,7 +2976,7 @@
           <a:bodyPr/>
           <a:lstStyle/>
           <a:p>
-            <a:fld id="{600A2B23-CD1C-44B4-B5A4-536257EE75C8}" type="slidenum">
+            <a:fld id="{00D1B6FB-B3E5-41B5-B956-FE3FF110E6A9}" type="slidenum">
               <a:rPr kumimoji="1" lang="ja-JP" altLang="en-US" smtClean="0"/>
               <a:t>‹#›</a:t>
             </a:fld>
@@ -2987,7 +2987,7 @@
     </p:spTree>
     <p:extLst>
       <p:ext uri="{BB962C8B-B14F-4D97-AF65-F5344CB8AC3E}">
-        <p14:creationId xmlns:p14="http://schemas.microsoft.com/office/powerpoint/2010/main" val="3605039868"/>
+        <p14:creationId xmlns:p14="http://schemas.microsoft.com/office/powerpoint/2010/main" val="3678174657"/>
       </p:ext>
     </p:extLst>
   </p:cSld>
@@ -3024,7 +3024,7 @@
           <p:cNvPr id="2" name="タイトル プレースホルダー 1">
             <a:extLst>
               <a:ext uri="{FF2B5EF4-FFF2-40B4-BE49-F238E27FC236}">
-                <a16:creationId xmlns:a16="http://schemas.microsoft.com/office/drawing/2014/main" id="{479C054C-F8F8-3CDC-3A5F-CF8DE2FE816D}"/>
+                <a16:creationId xmlns:a16="http://schemas.microsoft.com/office/drawing/2014/main" id="{4E49384D-DEA3-E3BA-1528-AD602D4F2293}"/>
               </a:ext>
             </a:extLst>
           </p:cNvPr>
@@ -3062,7 +3062,7 @@
           <p:cNvPr id="3" name="テキスト プレースホルダー 2">
             <a:extLst>
               <a:ext uri="{FF2B5EF4-FFF2-40B4-BE49-F238E27FC236}">
-                <a16:creationId xmlns:a16="http://schemas.microsoft.com/office/drawing/2014/main" id="{C22412D2-9071-AD37-4FCA-A7B96F5DB465}"/>
+                <a16:creationId xmlns:a16="http://schemas.microsoft.com/office/drawing/2014/main" id="{FDE21BEC-BB34-EDB4-8628-3FC8663600B8}"/>
               </a:ext>
             </a:extLst>
           </p:cNvPr>
@@ -3161,7 +3161,7 @@
           <p:cNvPr id="4" name="日付プレースホルダー 3">
             <a:extLst>
               <a:ext uri="{FF2B5EF4-FFF2-40B4-BE49-F238E27FC236}">
-                <a16:creationId xmlns:a16="http://schemas.microsoft.com/office/drawing/2014/main" id="{92C9E186-F6BB-264E-974D-878C39561F77}"/>
+                <a16:creationId xmlns:a16="http://schemas.microsoft.com/office/drawing/2014/main" id="{FE59C44E-8C7D-E2C3-37AA-C653A9C28EAB}"/>
               </a:ext>
             </a:extLst>
           </p:cNvPr>
@@ -3195,7 +3195,7 @@
             </a:lvl1pPr>
           </a:lstStyle>
           <a:p>
-            <a:fld id="{F04E7869-5D3E-4D61-9500-F031EB31109A}" type="datetimeFigureOut">
+            <a:fld id="{BD3B941C-3726-4D79-9544-F03D628DDEFE}" type="datetimeFigureOut">
               <a:rPr kumimoji="1" lang="ja-JP" altLang="en-US" smtClean="0"/>
               <a:t>2026/7/30</a:t>
             </a:fld>
@@ -3208,7 +3208,7 @@
           <p:cNvPr id="5" name="フッター プレースホルダー 4">
             <a:extLst>
               <a:ext uri="{FF2B5EF4-FFF2-40B4-BE49-F238E27FC236}">
-                <a16:creationId xmlns:a16="http://schemas.microsoft.com/office/drawing/2014/main" id="{665A8F57-1629-B982-8154-EDBF6D71D50E}"/>
+                <a16:creationId xmlns:a16="http://schemas.microsoft.com/office/drawing/2014/main" id="{2863A274-FDF8-8227-D67C-AD3F0D672F88}"/>
               </a:ext>
             </a:extLst>
           </p:cNvPr>
@@ -3251,7 +3251,7 @@
           <p:cNvPr id="6" name="スライド番号プレースホルダー 5">
             <a:extLst>
               <a:ext uri="{FF2B5EF4-FFF2-40B4-BE49-F238E27FC236}">
-                <a16:creationId xmlns:a16="http://schemas.microsoft.com/office/drawing/2014/main" id="{86F4A094-BC64-F394-0296-5D30F812BBD5}"/>
+                <a16:creationId xmlns:a16="http://schemas.microsoft.com/office/drawing/2014/main" id="{5B8AE387-B21B-721F-FE9C-220B4D4675B7}"/>
               </a:ext>
             </a:extLst>
           </p:cNvPr>
@@ -3285,7 +3285,7 @@
             </a:lvl1pPr>
           </a:lstStyle>
           <a:p>
-            <a:fld id="{600A2B23-CD1C-44B4-B5A4-536257EE75C8}" type="slidenum">
+            <a:fld id="{00D1B6FB-B3E5-41B5-B956-FE3FF110E6A9}" type="slidenum">
               <a:rPr kumimoji="1" lang="ja-JP" altLang="en-US" smtClean="0"/>
               <a:t>‹#›</a:t>
             </a:fld>
@@ -3296,7 +3296,7 @@
     </p:spTree>
     <p:extLst>
       <p:ext uri="{BB962C8B-B14F-4D97-AF65-F5344CB8AC3E}">
-        <p14:creationId xmlns:p14="http://schemas.microsoft.com/office/powerpoint/2010/main" val="2159928923"/>
+        <p14:creationId xmlns:p14="http://schemas.microsoft.com/office/powerpoint/2010/main" val="2308037462"/>
       </p:ext>
     </p:extLst>
   </p:cSld>
@@ -3619,7 +3619,7 @@
           <p:cNvPr id="2" name="テキスト ボックス 1">
             <a:extLst>
               <a:ext uri="{FF2B5EF4-FFF2-40B4-BE49-F238E27FC236}">
-                <a16:creationId xmlns:a16="http://schemas.microsoft.com/office/drawing/2014/main" id="{406D6BC4-28AD-6F9F-45FA-310C693EF9A3}"/>
+                <a16:creationId xmlns:a16="http://schemas.microsoft.com/office/drawing/2014/main" id="{8363EBAB-05D2-AC5E-F197-50A96B9D7C93}"/>
               </a:ext>
             </a:extLst>
           </p:cNvPr>
@@ -3665,7 +3665,7 @@
           <p:cNvPr id="3" name="テキスト ボックス 2">
             <a:extLst>
               <a:ext uri="{FF2B5EF4-FFF2-40B4-BE49-F238E27FC236}">
-                <a16:creationId xmlns:a16="http://schemas.microsoft.com/office/drawing/2014/main" id="{5A6BB856-DE78-AF98-4397-2F32C5ABF13B}"/>
+                <a16:creationId xmlns:a16="http://schemas.microsoft.com/office/drawing/2014/main" id="{197FD4F3-3750-D794-EFB5-62DD9C1232EC}"/>
               </a:ext>
             </a:extLst>
           </p:cNvPr>
@@ -3714,7 +3714,7 @@
           <p:cNvPr id="4" name="テキスト ボックス 3">
             <a:extLst>
               <a:ext uri="{FF2B5EF4-FFF2-40B4-BE49-F238E27FC236}">
-                <a16:creationId xmlns:a16="http://schemas.microsoft.com/office/drawing/2014/main" id="{F4599F29-B65D-E855-01A6-A900BAB3CF72}"/>
+                <a16:creationId xmlns:a16="http://schemas.microsoft.com/office/drawing/2014/main" id="{A1A30077-0888-88E9-4128-8C31B460773F}"/>
               </a:ext>
             </a:extLst>
           </p:cNvPr>
@@ -3754,7 +3754,7 @@
           <p:cNvPr id="5" name="テキスト ボックス 4">
             <a:extLst>
               <a:ext uri="{FF2B5EF4-FFF2-40B4-BE49-F238E27FC236}">
-                <a16:creationId xmlns:a16="http://schemas.microsoft.com/office/drawing/2014/main" id="{8E03F15C-56DA-753C-EABF-7B0649539EEA}"/>
+                <a16:creationId xmlns:a16="http://schemas.microsoft.com/office/drawing/2014/main" id="{F7C1C2F7-B8C9-00F3-1278-F3C3304D2825}"/>
               </a:ext>
             </a:extLst>
           </p:cNvPr>
@@ -3801,7 +3801,7 @@
             <a:hlinkClick r:id="" action="ppaction://media"/>
             <a:extLst>
               <a:ext uri="{FF2B5EF4-FFF2-40B4-BE49-F238E27FC236}">
-                <a16:creationId xmlns:a16="http://schemas.microsoft.com/office/drawing/2014/main" id="{E4790099-07DB-93FD-4446-C1208E5610A1}"/>
+                <a16:creationId xmlns:a16="http://schemas.microsoft.com/office/drawing/2014/main" id="{FF08C4AC-46B8-6663-08AD-FD6B970654BD}"/>
               </a:ext>
             </a:extLst>
           </p:cNvPr>
@@ -3836,7 +3836,7 @@
     </p:spTree>
     <p:extLst>
       <p:ext uri="{BB962C8B-B14F-4D97-AF65-F5344CB8AC3E}">
-        <p14:creationId xmlns:p14="http://schemas.microsoft.com/office/powerpoint/2010/main" val="94903802"/>
+        <p14:creationId xmlns:p14="http://schemas.microsoft.com/office/powerpoint/2010/main" val="1434733387"/>
       </p:ext>
     </p:extLst>
   </p:cSld>
@@ -3960,7 +3960,7 @@
           <p:cNvPr id="2" name="テキスト ボックス 1">
             <a:extLst>
               <a:ext uri="{FF2B5EF4-FFF2-40B4-BE49-F238E27FC236}">
-                <a16:creationId xmlns:a16="http://schemas.microsoft.com/office/drawing/2014/main" id="{BFEAFF20-D932-D5BE-23C5-0CBFA9AF5935}"/>
+                <a16:creationId xmlns:a16="http://schemas.microsoft.com/office/drawing/2014/main" id="{B1D6FE38-8721-D1F2-F15C-7552C089C412}"/>
               </a:ext>
             </a:extLst>
           </p:cNvPr>
@@ -4006,7 +4006,7 @@
           <p:cNvPr id="3" name="テキスト ボックス 2">
             <a:extLst>
               <a:ext uri="{FF2B5EF4-FFF2-40B4-BE49-F238E27FC236}">
-                <a16:creationId xmlns:a16="http://schemas.microsoft.com/office/drawing/2014/main" id="{47014159-A52B-FEFE-8E13-3B159C759DA4}"/>
+                <a16:creationId xmlns:a16="http://schemas.microsoft.com/office/drawing/2014/main" id="{0780EC2A-41F4-51D4-AACB-CC69DBDB0873}"/>
               </a:ext>
             </a:extLst>
           </p:cNvPr>
@@ -4046,7 +4046,7 @@
           <p:cNvPr id="4" name="テキスト ボックス 3">
             <a:extLst>
               <a:ext uri="{FF2B5EF4-FFF2-40B4-BE49-F238E27FC236}">
-                <a16:creationId xmlns:a16="http://schemas.microsoft.com/office/drawing/2014/main" id="{FFD9C058-3081-3DC4-24E4-23268B6FEBA9}"/>
+                <a16:creationId xmlns:a16="http://schemas.microsoft.com/office/drawing/2014/main" id="{9C723518-1777-2543-8CB3-A09C144A58BF}"/>
               </a:ext>
             </a:extLst>
           </p:cNvPr>
@@ -4131,7 +4131,7 @@
           <p:cNvPr id="5" name="テキスト ボックス 4">
             <a:extLst>
               <a:ext uri="{FF2B5EF4-FFF2-40B4-BE49-F238E27FC236}">
-                <a16:creationId xmlns:a16="http://schemas.microsoft.com/office/drawing/2014/main" id="{6B624D1B-3D93-3B92-F6FF-B65A628499B7}"/>
+                <a16:creationId xmlns:a16="http://schemas.microsoft.com/office/drawing/2014/main" id="{8BFBF6DD-81F5-9B55-FC31-1A0FB38725DF}"/>
               </a:ext>
             </a:extLst>
           </p:cNvPr>
@@ -4178,7 +4178,7 @@
             <a:hlinkClick r:id="" action="ppaction://media"/>
             <a:extLst>
               <a:ext uri="{FF2B5EF4-FFF2-40B4-BE49-F238E27FC236}">
-                <a16:creationId xmlns:a16="http://schemas.microsoft.com/office/drawing/2014/main" id="{97AF261D-207C-059B-D7A1-8E3006C7943D}"/>
+                <a16:creationId xmlns:a16="http://schemas.microsoft.com/office/drawing/2014/main" id="{0CB86D2D-78ED-0A5B-E73B-B655F368E0A3}"/>
               </a:ext>
             </a:extLst>
           </p:cNvPr>
@@ -4213,7 +4213,7 @@
     </p:spTree>
     <p:extLst>
       <p:ext uri="{BB962C8B-B14F-4D97-AF65-F5344CB8AC3E}">
-        <p14:creationId xmlns:p14="http://schemas.microsoft.com/office/powerpoint/2010/main" val="776261791"/>
+        <p14:creationId xmlns:p14="http://schemas.microsoft.com/office/powerpoint/2010/main" val="296942897"/>
       </p:ext>
     </p:extLst>
   </p:cSld>
@@ -4337,7 +4337,7 @@
           <p:cNvPr id="2" name="テキスト ボックス 1">
             <a:extLst>
               <a:ext uri="{FF2B5EF4-FFF2-40B4-BE49-F238E27FC236}">
-                <a16:creationId xmlns:a16="http://schemas.microsoft.com/office/drawing/2014/main" id="{72BA9F24-5D16-9581-E79C-B14FF4F24425}"/>
+                <a16:creationId xmlns:a16="http://schemas.microsoft.com/office/drawing/2014/main" id="{EBAE965C-3AC6-EDD9-3CD5-8A1D7513C82F}"/>
               </a:ext>
             </a:extLst>
           </p:cNvPr>
@@ -4383,7 +4383,7 @@
           <p:cNvPr id="3" name="テキスト ボックス 2">
             <a:extLst>
               <a:ext uri="{FF2B5EF4-FFF2-40B4-BE49-F238E27FC236}">
-                <a16:creationId xmlns:a16="http://schemas.microsoft.com/office/drawing/2014/main" id="{F60354CC-320C-5A2E-6DA0-35B8E276BE0C}"/>
+                <a16:creationId xmlns:a16="http://schemas.microsoft.com/office/drawing/2014/main" id="{8CCA1A1D-8ACC-17C7-6BAB-660A55ACA663}"/>
               </a:ext>
             </a:extLst>
           </p:cNvPr>
@@ -4423,7 +4423,7 @@
           <p:cNvPr id="4" name="テキスト ボックス 3">
             <a:extLst>
               <a:ext uri="{FF2B5EF4-FFF2-40B4-BE49-F238E27FC236}">
-                <a16:creationId xmlns:a16="http://schemas.microsoft.com/office/drawing/2014/main" id="{4E00A1EC-91DD-9E91-BF3A-A62E655B0F0E}"/>
+                <a16:creationId xmlns:a16="http://schemas.microsoft.com/office/drawing/2014/main" id="{37530960-20BF-2172-B270-4DA64DC262DE}"/>
               </a:ext>
             </a:extLst>
           </p:cNvPr>
@@ -4500,7 +4500,7 @@
           <p:cNvPr id="5" name="テキスト ボックス 4">
             <a:extLst>
               <a:ext uri="{FF2B5EF4-FFF2-40B4-BE49-F238E27FC236}">
-                <a16:creationId xmlns:a16="http://schemas.microsoft.com/office/drawing/2014/main" id="{6516A0D5-179E-0F24-E452-E27AF2327841}"/>
+                <a16:creationId xmlns:a16="http://schemas.microsoft.com/office/drawing/2014/main" id="{F80D3324-185F-1BDF-BF71-6A0269ECF068}"/>
               </a:ext>
             </a:extLst>
           </p:cNvPr>
@@ -4547,7 +4547,7 @@
             <a:hlinkClick r:id="" action="ppaction://media"/>
             <a:extLst>
               <a:ext uri="{FF2B5EF4-FFF2-40B4-BE49-F238E27FC236}">
-                <a16:creationId xmlns:a16="http://schemas.microsoft.com/office/drawing/2014/main" id="{BF1C7793-95EE-02DF-1E98-6F3372C84CD6}"/>
+                <a16:creationId xmlns:a16="http://schemas.microsoft.com/office/drawing/2014/main" id="{0BA61DF5-EDE9-B7DF-08AD-59D6E47B43E1}"/>
               </a:ext>
             </a:extLst>
           </p:cNvPr>
@@ -4582,7 +4582,7 @@
     </p:spTree>
     <p:extLst>
       <p:ext uri="{BB962C8B-B14F-4D97-AF65-F5344CB8AC3E}">
-        <p14:creationId xmlns:p14="http://schemas.microsoft.com/office/powerpoint/2010/main" val="1371685764"/>
+        <p14:creationId xmlns:p14="http://schemas.microsoft.com/office/powerpoint/2010/main" val="2845179741"/>
       </p:ext>
     </p:extLst>
   </p:cSld>
@@ -4706,7 +4706,7 @@
           <p:cNvPr id="2" name="テキスト ボックス 1">
             <a:extLst>
               <a:ext uri="{FF2B5EF4-FFF2-40B4-BE49-F238E27FC236}">
-                <a16:creationId xmlns:a16="http://schemas.microsoft.com/office/drawing/2014/main" id="{BAB33801-CBDD-F18D-C427-894B56B9CE10}"/>
+                <a16:creationId xmlns:a16="http://schemas.microsoft.com/office/drawing/2014/main" id="{7B21BAB4-E6BF-8128-F79F-1FC6924A5F1D}"/>
               </a:ext>
             </a:extLst>
           </p:cNvPr>
@@ -4752,7 +4752,7 @@
           <p:cNvPr id="3" name="テキスト ボックス 2">
             <a:extLst>
               <a:ext uri="{FF2B5EF4-FFF2-40B4-BE49-F238E27FC236}">
-                <a16:creationId xmlns:a16="http://schemas.microsoft.com/office/drawing/2014/main" id="{72D47C6E-D666-D2C9-AF12-68EF2BEE8879}"/>
+                <a16:creationId xmlns:a16="http://schemas.microsoft.com/office/drawing/2014/main" id="{4CE8674E-8B07-F86F-66CA-223C93261883}"/>
               </a:ext>
             </a:extLst>
           </p:cNvPr>
@@ -4792,7 +4792,7 @@
           <p:cNvPr id="4" name="テキスト ボックス 3">
             <a:extLst>
               <a:ext uri="{FF2B5EF4-FFF2-40B4-BE49-F238E27FC236}">
-                <a16:creationId xmlns:a16="http://schemas.microsoft.com/office/drawing/2014/main" id="{D06F5AF2-88AA-C88F-D6D9-031D6801A858}"/>
+                <a16:creationId xmlns:a16="http://schemas.microsoft.com/office/drawing/2014/main" id="{7BBE9956-88F9-5205-021E-B702BD65D27D}"/>
               </a:ext>
             </a:extLst>
           </p:cNvPr>
@@ -4902,7 +4902,7 @@
           <p:cNvPr id="5" name="テキスト ボックス 4">
             <a:extLst>
               <a:ext uri="{FF2B5EF4-FFF2-40B4-BE49-F238E27FC236}">
-                <a16:creationId xmlns:a16="http://schemas.microsoft.com/office/drawing/2014/main" id="{3B742B59-416A-0672-654F-E8481BEAFFC5}"/>
+                <a16:creationId xmlns:a16="http://schemas.microsoft.com/office/drawing/2014/main" id="{0498D45D-1B7A-1CE1-E34D-94196CBCACEE}"/>
               </a:ext>
             </a:extLst>
           </p:cNvPr>
@@ -4949,7 +4949,7 @@
             <a:hlinkClick r:id="" action="ppaction://media"/>
             <a:extLst>
               <a:ext uri="{FF2B5EF4-FFF2-40B4-BE49-F238E27FC236}">
-                <a16:creationId xmlns:a16="http://schemas.microsoft.com/office/drawing/2014/main" id="{AB246880-35AE-582A-DEA3-A57D4C91F788}"/>
+                <a16:creationId xmlns:a16="http://schemas.microsoft.com/office/drawing/2014/main" id="{DB29A544-069F-9EC6-E1C7-646CBDF350E0}"/>
               </a:ext>
             </a:extLst>
           </p:cNvPr>
@@ -4984,7 +4984,7 @@
     </p:spTree>
     <p:extLst>
       <p:ext uri="{BB962C8B-B14F-4D97-AF65-F5344CB8AC3E}">
-        <p14:creationId xmlns:p14="http://schemas.microsoft.com/office/powerpoint/2010/main" val="2579268069"/>
+        <p14:creationId xmlns:p14="http://schemas.microsoft.com/office/powerpoint/2010/main" val="2748040769"/>
       </p:ext>
     </p:extLst>
   </p:cSld>
@@ -5108,7 +5108,7 @@
           <p:cNvPr id="2" name="テキスト ボックス 1">
             <a:extLst>
               <a:ext uri="{FF2B5EF4-FFF2-40B4-BE49-F238E27FC236}">
-                <a16:creationId xmlns:a16="http://schemas.microsoft.com/office/drawing/2014/main" id="{96B5D752-5E41-6463-19B7-AD3D59A80F08}"/>
+                <a16:creationId xmlns:a16="http://schemas.microsoft.com/office/drawing/2014/main" id="{CF9B7208-E1BB-12FF-249D-84A57DCA017C}"/>
               </a:ext>
             </a:extLst>
           </p:cNvPr>
@@ -5154,7 +5154,7 @@
           <p:cNvPr id="3" name="テキスト ボックス 2">
             <a:extLst>
               <a:ext uri="{FF2B5EF4-FFF2-40B4-BE49-F238E27FC236}">
-                <a16:creationId xmlns:a16="http://schemas.microsoft.com/office/drawing/2014/main" id="{288B33F5-C536-B46E-1EA4-1CB6502628AD}"/>
+                <a16:creationId xmlns:a16="http://schemas.microsoft.com/office/drawing/2014/main" id="{82F89627-7BDC-1289-ABCC-87348368110B}"/>
               </a:ext>
             </a:extLst>
           </p:cNvPr>
@@ -5194,7 +5194,7 @@
           <p:cNvPr id="4" name="テキスト ボックス 3">
             <a:extLst>
               <a:ext uri="{FF2B5EF4-FFF2-40B4-BE49-F238E27FC236}">
-                <a16:creationId xmlns:a16="http://schemas.microsoft.com/office/drawing/2014/main" id="{9E4B5BF6-EAD0-63BE-C05E-92D3FAE03C1B}"/>
+                <a16:creationId xmlns:a16="http://schemas.microsoft.com/office/drawing/2014/main" id="{F7FE20F1-75EF-31D4-EE13-601C2BAB8067}"/>
               </a:ext>
             </a:extLst>
           </p:cNvPr>
@@ -5218,20 +5218,14 @@
           <a:lstStyle/>
           <a:p>
             <a:r>
-              <a:rPr kumimoji="1" lang="en-US" altLang="ja-JP" sz="2000">
+              <a:rPr kumimoji="1" lang="ja-JP" altLang="en-US" sz="2000">
                 <a:solidFill>
                   <a:srgbClr val="333333"/>
                 </a:solidFill>
                 <a:latin typeface="Arial" panose="020B0604020202020204" pitchFamily="34" charset="0"/>
               </a:rPr>
-              <a:t>Rebrand web platform as SPOTPALETTE</a:t>
-            </a:r>
-            <a:endParaRPr kumimoji="1" lang="ja-JP" altLang="en-US" sz="2000">
-              <a:solidFill>
-                <a:srgbClr val="333333"/>
-              </a:solidFill>
-              <a:latin typeface="Arial" panose="020B0604020202020204" pitchFamily="34" charset="0"/>
-            </a:endParaRPr>
+              <a:t>直近のコミットでは、実装の見直しと継続的な改善が行われました。</a:t>
+            </a:r>
           </a:p>
         </p:txBody>
       </p:sp>
@@ -5240,7 +5234,7 @@
           <p:cNvPr id="5" name="テキスト ボックス 4">
             <a:extLst>
               <a:ext uri="{FF2B5EF4-FFF2-40B4-BE49-F238E27FC236}">
-                <a16:creationId xmlns:a16="http://schemas.microsoft.com/office/drawing/2014/main" id="{484B3AEB-9745-1F23-C1F2-DE0CE0926189}"/>
+                <a16:creationId xmlns:a16="http://schemas.microsoft.com/office/drawing/2014/main" id="{F9D023B1-F444-0728-DF48-D361E0F433EF}"/>
               </a:ext>
             </a:extLst>
           </p:cNvPr>
@@ -5287,7 +5281,7 @@
             <a:hlinkClick r:id="" action="ppaction://media"/>
             <a:extLst>
               <a:ext uri="{FF2B5EF4-FFF2-40B4-BE49-F238E27FC236}">
-                <a16:creationId xmlns:a16="http://schemas.microsoft.com/office/drawing/2014/main" id="{D892CD9C-82E5-EFCC-1118-67F2C2FA59C0}"/>
+                <a16:creationId xmlns:a16="http://schemas.microsoft.com/office/drawing/2014/main" id="{915BDF39-6642-2291-58B7-7B5C08951FCA}"/>
               </a:ext>
             </a:extLst>
           </p:cNvPr>
@@ -5322,7 +5316,7 @@
     </p:spTree>
     <p:extLst>
       <p:ext uri="{BB962C8B-B14F-4D97-AF65-F5344CB8AC3E}">
-        <p14:creationId xmlns:p14="http://schemas.microsoft.com/office/powerpoint/2010/main" val="2494438451"/>
+        <p14:creationId xmlns:p14="http://schemas.microsoft.com/office/powerpoint/2010/main" val="3407476917"/>
       </p:ext>
     </p:extLst>
   </p:cSld>
@@ -5365,7 +5359,7 @@
                                   <p:childTnLst>
                                     <p:cmd type="call" cmd="playFrom(0.0)">
                                       <p:cBhvr>
-                                        <p:cTn id="6" dur="6981" fill="hold"/>
+                                        <p:cTn id="6" dur="6076" fill="hold"/>
                                         <p:tgtEl>
                                           <p:spTgt spid="6"/>
                                         </p:tgtEl>
@@ -5446,7 +5440,7 @@
           <p:cNvPr id="2" name="テキスト ボックス 1">
             <a:extLst>
               <a:ext uri="{FF2B5EF4-FFF2-40B4-BE49-F238E27FC236}">
-                <a16:creationId xmlns:a16="http://schemas.microsoft.com/office/drawing/2014/main" id="{9D747A65-0BFF-977E-9EC6-DFD630909431}"/>
+                <a16:creationId xmlns:a16="http://schemas.microsoft.com/office/drawing/2014/main" id="{285B060A-2980-258A-D014-755586EE1437}"/>
               </a:ext>
             </a:extLst>
           </p:cNvPr>
@@ -5492,7 +5486,7 @@
           <p:cNvPr id="3" name="テキスト ボックス 2">
             <a:extLst>
               <a:ext uri="{FF2B5EF4-FFF2-40B4-BE49-F238E27FC236}">
-                <a16:creationId xmlns:a16="http://schemas.microsoft.com/office/drawing/2014/main" id="{B8DC0B96-97EE-4890-40DC-83825F8D8546}"/>
+                <a16:creationId xmlns:a16="http://schemas.microsoft.com/office/drawing/2014/main" id="{B5455BF2-8D01-365E-661A-2071A86DE76D}"/>
               </a:ext>
             </a:extLst>
           </p:cNvPr>
@@ -5532,7 +5526,7 @@
           <p:cNvPr id="4" name="テキスト ボックス 3">
             <a:extLst>
               <a:ext uri="{FF2B5EF4-FFF2-40B4-BE49-F238E27FC236}">
-                <a16:creationId xmlns:a16="http://schemas.microsoft.com/office/drawing/2014/main" id="{131BBD11-ED31-84F9-2B0B-438A88BD2B58}"/>
+                <a16:creationId xmlns:a16="http://schemas.microsoft.com/office/drawing/2014/main" id="{509BD986-8497-2259-1858-ECB405FF45D6}"/>
               </a:ext>
             </a:extLst>
           </p:cNvPr>
@@ -5597,7 +5591,7 @@
           <p:cNvPr id="5" name="テキスト ボックス 4">
             <a:extLst>
               <a:ext uri="{FF2B5EF4-FFF2-40B4-BE49-F238E27FC236}">
-                <a16:creationId xmlns:a16="http://schemas.microsoft.com/office/drawing/2014/main" id="{C08D8001-F3ED-A10A-4F25-6CBACF8C8C7A}"/>
+                <a16:creationId xmlns:a16="http://schemas.microsoft.com/office/drawing/2014/main" id="{2D7AB210-5DEC-5390-D6A7-0BF333C24A9E}"/>
               </a:ext>
             </a:extLst>
           </p:cNvPr>
@@ -5644,7 +5638,7 @@
             <a:hlinkClick r:id="" action="ppaction://media"/>
             <a:extLst>
               <a:ext uri="{FF2B5EF4-FFF2-40B4-BE49-F238E27FC236}">
-                <a16:creationId xmlns:a16="http://schemas.microsoft.com/office/drawing/2014/main" id="{D5F4B6A8-C362-CFC8-AD1F-631D4C5DD077}"/>
+                <a16:creationId xmlns:a16="http://schemas.microsoft.com/office/drawing/2014/main" id="{272166C9-76E2-437C-A410-27018C0ECF02}"/>
               </a:ext>
             </a:extLst>
           </p:cNvPr>
@@ -5679,7 +5673,7 @@
     </p:spTree>
     <p:extLst>
       <p:ext uri="{BB962C8B-B14F-4D97-AF65-F5344CB8AC3E}">
-        <p14:creationId xmlns:p14="http://schemas.microsoft.com/office/powerpoint/2010/main" val="3744174715"/>
+        <p14:creationId xmlns:p14="http://schemas.microsoft.com/office/powerpoint/2010/main" val="1759121572"/>
       </p:ext>
     </p:extLst>
   </p:cSld>
